--- a/03-Python程序设计-项目实战/V2授课PPT/W06-第11次课-让程序同时听三个PLC说话.pptx
+++ b/03-Python程序设计-项目实战/V2授课PPT/W06-第11次课-让程序同时听三个PLC说话.pptx
@@ -52,6 +52,9 @@
     <p:sldId id="367" r:id="rId45"/>
     <p:sldId id="335" r:id="rId46"/>
     <p:sldId id="336" r:id="rId47"/>
+    <p:sldId id="368" r:id="rId66"/>
+    <p:sldId id="369" r:id="rId67"/>
+    <p:sldId id="370" r:id="rId68"/>
     <p:sldId id="337" r:id="rId48"/>
     <p:sldId id="338" r:id="rId49"/>
     <p:sldId id="339" r:id="rId50"/>
@@ -8465,7 +8468,7 @@
                 </a:solidFill>
                 <a:latin typeface="微软雅黑" panose="020B0502040204020203" charset="-122"/>
               </a:rPr>
-              <a:t>10 / 59</a:t>
+              <a:t>10 / 62</a:t>
             </a:r>
             <a:endParaRPr sz="1000" b="0">
               <a:solidFill>
@@ -9219,7 +9222,7 @@
                 </a:solidFill>
                 <a:latin typeface="微软雅黑" panose="020B0502040204020203" charset="-122"/>
               </a:rPr>
-              <a:t>11 / 59</a:t>
+              <a:t>11 / 62</a:t>
             </a:r>
             <a:endParaRPr sz="1000" b="0">
               <a:solidFill>
@@ -9973,7 +9976,7 @@
                 </a:solidFill>
                 <a:latin typeface="微软雅黑" panose="020B0502040204020203" charset="-122"/>
               </a:rPr>
-              <a:t>12 / 59</a:t>
+              <a:t>12 / 62</a:t>
             </a:r>
             <a:endParaRPr sz="1000" b="0">
               <a:solidFill>
@@ -10501,7 +10504,7 @@
                 </a:solidFill>
                 <a:latin typeface="微软雅黑" panose="020B0502040204020203" charset="-122"/>
               </a:rPr>
-              <a:t>13 / 59</a:t>
+              <a:t>13 / 62</a:t>
             </a:r>
             <a:endParaRPr sz="1000" b="0">
               <a:solidFill>
@@ -11516,7 +11519,7 @@
                 </a:solidFill>
                 <a:latin typeface="微软雅黑" panose="020B0502040204020203" charset="-122"/>
               </a:rPr>
-              <a:t>14 / 59</a:t>
+              <a:t>14 / 62</a:t>
             </a:r>
             <a:endParaRPr sz="1000" b="0">
               <a:solidFill>
@@ -12270,7 +12273,7 @@
                 </a:solidFill>
                 <a:latin typeface="微软雅黑" panose="020B0502040204020203" charset="-122"/>
               </a:rPr>
-              <a:t>15 / 59</a:t>
+              <a:t>15 / 62</a:t>
             </a:r>
             <a:endParaRPr sz="1000" b="0">
               <a:solidFill>
@@ -12774,7 +12777,7 @@
                 </a:solidFill>
                 <a:latin typeface="微软雅黑" panose="020B0502040204020203" charset="-122"/>
               </a:rPr>
-              <a:t>16 / 59</a:t>
+              <a:t>16 / 62</a:t>
             </a:r>
             <a:endParaRPr sz="1000" b="0">
               <a:solidFill>
@@ -13538,7 +13541,7 @@
                 </a:solidFill>
                 <a:latin typeface="微软雅黑" panose="020B0502040204020203" charset="-122"/>
               </a:rPr>
-              <a:t>17 / 59</a:t>
+              <a:t>17 / 62</a:t>
             </a:r>
             <a:endParaRPr sz="1000" b="0">
               <a:solidFill>
@@ -14576,7 +14579,7 @@
                 </a:solidFill>
                 <a:latin typeface="微软雅黑" panose="020B0502040204020203" charset="-122"/>
               </a:rPr>
-              <a:t>18 / 59</a:t>
+              <a:t>18 / 62</a:t>
             </a:r>
             <a:endParaRPr sz="1000" b="0">
               <a:solidFill>
@@ -15497,7 +15500,7 @@
                 </a:solidFill>
                 <a:latin typeface="微软雅黑" panose="020B0502040204020203" charset="-122"/>
               </a:rPr>
-              <a:t>19 / 59</a:t>
+              <a:t>19 / 62</a:t>
             </a:r>
             <a:endParaRPr sz="1000" b="0">
               <a:solidFill>
@@ -17393,7 +17396,7 @@
                 </a:solidFill>
                 <a:latin typeface="微软雅黑" panose="020B0502040204020203" charset="-122"/>
               </a:rPr>
-              <a:t>2 / 59</a:t>
+              <a:t>2 / 62</a:t>
             </a:r>
             <a:endParaRPr sz="1000" b="0">
               <a:solidFill>
@@ -18429,7 +18432,7 @@
                 </a:solidFill>
                 <a:latin typeface="微软雅黑" panose="020B0502040204020203" charset="-122"/>
               </a:rPr>
-              <a:t>20 / 59</a:t>
+              <a:t>20 / 62</a:t>
             </a:r>
             <a:endParaRPr sz="1000" b="0">
               <a:solidFill>
@@ -19001,7 +19004,7 @@
                 </a:solidFill>
                 <a:latin typeface="微软雅黑" panose="020B0502040204020203" charset="-122"/>
               </a:rPr>
-              <a:t>21 / 59</a:t>
+              <a:t>21 / 62</a:t>
             </a:r>
             <a:endParaRPr sz="1000" b="0">
               <a:solidFill>
@@ -20046,7 +20049,7 @@
                 </a:solidFill>
                 <a:latin typeface="微软雅黑" panose="020B0502040204020203" charset="-122"/>
               </a:rPr>
-              <a:t>22 / 59</a:t>
+              <a:t>22 / 62</a:t>
             </a:r>
             <a:endParaRPr sz="1000" b="0">
               <a:solidFill>
@@ -21082,7 +21085,7 @@
                 </a:solidFill>
                 <a:latin typeface="微软雅黑" panose="020B0502040204020203" charset="-122"/>
               </a:rPr>
-              <a:t>23 / 59</a:t>
+              <a:t>23 / 62</a:t>
             </a:r>
             <a:endParaRPr sz="1000" b="0">
               <a:solidFill>
@@ -22118,7 +22121,7 @@
                 </a:solidFill>
                 <a:latin typeface="微软雅黑" panose="020B0502040204020203" charset="-122"/>
               </a:rPr>
-              <a:t>24 / 59</a:t>
+              <a:t>24 / 62</a:t>
             </a:r>
             <a:endParaRPr sz="1000" b="0">
               <a:solidFill>
@@ -23154,7 +23157,7 @@
                 </a:solidFill>
                 <a:latin typeface="微软雅黑" panose="020B0502040204020203" charset="-122"/>
               </a:rPr>
-              <a:t>25 / 59</a:t>
+              <a:t>25 / 62</a:t>
             </a:r>
             <a:endParaRPr sz="1000" b="0">
               <a:solidFill>
@@ -24190,7 +24193,7 @@
                 </a:solidFill>
                 <a:latin typeface="微软雅黑" panose="020B0502040204020203" charset="-122"/>
               </a:rPr>
-              <a:t>26 / 59</a:t>
+              <a:t>26 / 62</a:t>
             </a:r>
             <a:endParaRPr sz="1000" b="0">
               <a:solidFill>
@@ -25228,7 +25231,7 @@
                 </a:solidFill>
                 <a:latin typeface="微软雅黑" panose="020B0502040204020203" charset="-122"/>
               </a:rPr>
-              <a:t>27 / 59</a:t>
+              <a:t>27 / 62</a:t>
             </a:r>
             <a:endParaRPr sz="1000" b="0">
               <a:solidFill>
@@ -25982,7 +25985,7 @@
                 </a:solidFill>
                 <a:latin typeface="微软雅黑" panose="020B0502040204020203" charset="-122"/>
               </a:rPr>
-              <a:t>28 / 59</a:t>
+              <a:t>28 / 62</a:t>
             </a:r>
             <a:endParaRPr sz="1000" b="0">
               <a:solidFill>
@@ -26587,7 +26590,7 @@
                 </a:solidFill>
                 <a:latin typeface="微软雅黑" panose="020B0502040204020203" charset="-122"/>
               </a:rPr>
-              <a:t>29 / 59</a:t>
+              <a:t>29 / 62</a:t>
             </a:r>
             <a:endParaRPr sz="1000" b="0">
               <a:solidFill>
@@ -27508,7 +27511,7 @@
                 </a:solidFill>
                 <a:latin typeface="微软雅黑" panose="020B0502040204020203" charset="-122"/>
               </a:rPr>
-              <a:t>3 / 59</a:t>
+              <a:t>3 / 62</a:t>
             </a:r>
             <a:endParaRPr sz="1000" b="0">
               <a:solidFill>
@@ -28429,7 +28432,7 @@
                 </a:solidFill>
                 <a:latin typeface="微软雅黑" panose="020B0502040204020203" charset="-122"/>
               </a:rPr>
-              <a:t>30 / 59</a:t>
+              <a:t>30 / 62</a:t>
             </a:r>
             <a:endParaRPr sz="1000" b="0">
               <a:solidFill>
@@ -29839,7 +29842,7 @@
                 </a:solidFill>
                 <a:latin typeface="微软雅黑" panose="020B0502040204020203" charset="-122"/>
               </a:rPr>
-              <a:t>31 / 59</a:t>
+              <a:t>31 / 62</a:t>
             </a:r>
             <a:endParaRPr sz="1000" b="0">
               <a:solidFill>
@@ -30685,7 +30688,7 @@
                 </a:solidFill>
                 <a:latin typeface="微软雅黑" panose="020B0502040204020203" charset="-122"/>
               </a:rPr>
-              <a:t>32 / 59</a:t>
+              <a:t>32 / 62</a:t>
             </a:r>
             <a:endParaRPr sz="1000" b="0">
               <a:solidFill>
@@ -31384,7 +31387,7 @@
                 </a:solidFill>
                 <a:latin typeface="微软雅黑" panose="020B0502040204020203" charset="-122"/>
               </a:rPr>
-              <a:t>33 / 59</a:t>
+              <a:t>33 / 62</a:t>
             </a:r>
             <a:endParaRPr sz="1000" b="0">
               <a:solidFill>
@@ -32376,7 +32379,7 @@
                 </a:solidFill>
                 <a:latin typeface="微软雅黑" panose="020B0502040204020203" charset="-122"/>
               </a:rPr>
-              <a:t>34 / 59</a:t>
+              <a:t>34 / 62</a:t>
             </a:r>
             <a:endParaRPr sz="1000" b="0">
               <a:solidFill>
@@ -33368,7 +33371,7 @@
                 </a:solidFill>
                 <a:latin typeface="微软雅黑" panose="020B0502040204020203" charset="-122"/>
               </a:rPr>
-              <a:t>35 / 59</a:t>
+              <a:t>35 / 62</a:t>
             </a:r>
             <a:endParaRPr sz="1000" b="0">
               <a:solidFill>
@@ -34360,7 +34363,7 @@
                 </a:solidFill>
                 <a:latin typeface="微软雅黑" panose="020B0502040204020203" charset="-122"/>
               </a:rPr>
-              <a:t>36 / 59</a:t>
+              <a:t>36 / 62</a:t>
             </a:r>
             <a:endParaRPr sz="1000" b="0">
               <a:solidFill>
@@ -35377,7 +35380,7 @@
                 </a:solidFill>
                 <a:latin typeface="微软雅黑" panose="020B0502040204020203" charset="-122"/>
               </a:rPr>
-              <a:t>37 / 59</a:t>
+              <a:t>37 / 62</a:t>
             </a:r>
             <a:endParaRPr sz="1000" b="0">
               <a:solidFill>
@@ -36377,7 +36380,7 @@
                 </a:solidFill>
                 <a:latin typeface="微软雅黑" panose="020B0502040204020203" charset="-122"/>
               </a:rPr>
-              <a:t>38 / 59</a:t>
+              <a:t>38 / 62</a:t>
             </a:r>
             <a:endParaRPr sz="1000" b="0">
               <a:solidFill>
@@ -37373,7 +37376,7 @@
                 </a:solidFill>
                 <a:latin typeface="微软雅黑" panose="020B0502040204020203" charset="-122"/>
               </a:rPr>
-              <a:t>39 / 59</a:t>
+              <a:t>39 / 62</a:t>
             </a:r>
             <a:endParaRPr sz="1000" b="0">
               <a:solidFill>
@@ -38411,7 +38414,7 @@
                 </a:solidFill>
                 <a:latin typeface="微软雅黑" panose="020B0502040204020203" charset="-122"/>
               </a:rPr>
-              <a:t>4 / 59</a:t>
+              <a:t>4 / 62</a:t>
             </a:r>
             <a:endParaRPr sz="1000" b="0">
               <a:solidFill>
@@ -39257,7 +39260,7 @@
                 </a:solidFill>
                 <a:latin typeface="微软雅黑" panose="020B0502040204020203" charset="-122"/>
               </a:rPr>
-              <a:t>40 / 59</a:t>
+              <a:t>40 / 62</a:t>
             </a:r>
             <a:endParaRPr sz="1000" b="0">
               <a:solidFill>
@@ -40103,7 +40106,7 @@
                 </a:solidFill>
                 <a:latin typeface="微软雅黑" panose="020B0502040204020203" charset="-122"/>
               </a:rPr>
-              <a:t>41 / 59</a:t>
+              <a:t>41 / 62</a:t>
             </a:r>
             <a:endParaRPr sz="1000" b="0">
               <a:solidFill>
@@ -42295,7 +42298,7 @@
                 </a:solidFill>
                 <a:latin typeface="微软雅黑" panose="020B0502040204020203" charset="-122"/>
               </a:rPr>
-              <a:t>43 / 59</a:t>
+              <a:t>43 / 62</a:t>
             </a:r>
             <a:endParaRPr sz="1000" b="0">
               <a:solidFill>
@@ -43063,7 +43066,7 @@
                 </a:solidFill>
                 <a:latin typeface="微软雅黑" panose="020B0502040204020203" charset="-122"/>
               </a:rPr>
-              <a:t>44 / 59</a:t>
+              <a:t>44 / 62</a:t>
             </a:r>
             <a:endParaRPr sz="1000" b="0">
               <a:solidFill>
@@ -43793,7 +43796,7 @@
                 </a:solidFill>
                 <a:latin typeface="微软雅黑" panose="020B0502040204020203" charset="-122"/>
               </a:rPr>
-              <a:t>45 / 59</a:t>
+              <a:t>48 / 62</a:t>
             </a:r>
             <a:endParaRPr sz="1000" b="0">
               <a:solidFill>
@@ -44432,7 +44435,7 @@
                 </a:solidFill>
                 <a:latin typeface="微软雅黑" panose="020B0502040204020203" charset="-122"/>
               </a:rPr>
-              <a:t>46 / 59</a:t>
+              <a:t>49 / 62</a:t>
             </a:r>
             <a:endParaRPr sz="1000" b="0">
               <a:solidFill>
@@ -45278,7 +45281,7 @@
                 </a:solidFill>
                 <a:latin typeface="微软雅黑" panose="020B0502040204020203" charset="-122"/>
               </a:rPr>
-              <a:t>47 / 59</a:t>
+              <a:t>50 / 62</a:t>
             </a:r>
             <a:endParaRPr sz="1000" b="0">
               <a:solidFill>
@@ -47024,7 +47027,7 @@
                 </a:solidFill>
                 <a:latin typeface="微软雅黑" panose="020B0502040204020203" charset="-122"/>
               </a:rPr>
-              <a:t>48 / 59</a:t>
+              <a:t>51 / 62</a:t>
             </a:r>
             <a:endParaRPr sz="1000" b="0">
               <a:solidFill>
@@ -47876,7 +47879,7 @@
                 </a:solidFill>
                 <a:latin typeface="微软雅黑" panose="020B0502040204020203" charset="-122"/>
               </a:rPr>
-              <a:t>49 / 59</a:t>
+              <a:t>52 / 62</a:t>
             </a:r>
             <a:endParaRPr sz="1000" b="0">
               <a:solidFill>
@@ -49440,7 +49443,7 @@
                 </a:solidFill>
                 <a:latin typeface="微软雅黑" panose="020B0502040204020203" charset="-122"/>
               </a:rPr>
-              <a:t>5 / 59</a:t>
+              <a:t>5 / 62</a:t>
             </a:r>
             <a:endParaRPr sz="1000" b="0">
               <a:solidFill>
@@ -50664,7 +50667,7 @@
                 </a:solidFill>
                 <a:latin typeface="微软雅黑" panose="020B0502040204020203" charset="-122"/>
               </a:rPr>
-              <a:t>50 / 59</a:t>
+              <a:t>53 / 62</a:t>
             </a:r>
             <a:endParaRPr sz="1000" b="0">
               <a:solidFill>
@@ -51583,7 +51586,7 @@
                 </a:solidFill>
                 <a:latin typeface="微软雅黑" panose="020B0502040204020203" charset="-122"/>
               </a:rPr>
-              <a:t>51 / 59</a:t>
+              <a:t>54 / 62</a:t>
             </a:r>
             <a:endParaRPr sz="1000" b="0">
               <a:solidFill>
@@ -52621,7 +52624,7 @@
                 </a:solidFill>
                 <a:latin typeface="微软雅黑" panose="020B0502040204020203" charset="-122"/>
               </a:rPr>
-              <a:t>52 / 59</a:t>
+              <a:t>55 / 62</a:t>
             </a:r>
             <a:endParaRPr sz="1000" b="0">
               <a:solidFill>
@@ -53659,7 +53662,7 @@
                 </a:solidFill>
                 <a:latin typeface="微软雅黑" panose="020B0502040204020203" charset="-122"/>
               </a:rPr>
-              <a:t>53 / 59</a:t>
+              <a:t>56 / 62</a:t>
             </a:r>
             <a:endParaRPr sz="1000" b="0">
               <a:solidFill>
@@ -55002,7 +55005,7 @@
                 </a:solidFill>
                 <a:latin typeface="微软雅黑" panose="020B0502040204020203" charset="-122"/>
               </a:rPr>
-              <a:t>54 / 59</a:t>
+              <a:t>57 / 62</a:t>
             </a:r>
             <a:endParaRPr sz="1000" b="0">
               <a:solidFill>
@@ -56040,7 +56043,7 @@
                 </a:solidFill>
                 <a:latin typeface="微软雅黑" panose="020B0502040204020203" charset="-122"/>
               </a:rPr>
-              <a:t>55 / 59</a:t>
+              <a:t>58 / 62</a:t>
             </a:r>
             <a:endParaRPr sz="1000" b="0">
               <a:solidFill>
@@ -57078,7 +57081,7 @@
                 </a:solidFill>
                 <a:latin typeface="微软雅黑" panose="020B0502040204020203" charset="-122"/>
               </a:rPr>
-              <a:t>56 / 59</a:t>
+              <a:t>59 / 62</a:t>
             </a:r>
             <a:endParaRPr sz="1000" b="0">
               <a:solidFill>
@@ -57924,7 +57927,7 @@
                 </a:solidFill>
                 <a:latin typeface="微软雅黑" panose="020B0502040204020203" charset="-122"/>
               </a:rPr>
-              <a:t>57 / 59</a:t>
+              <a:t>60 / 62</a:t>
             </a:r>
             <a:endParaRPr sz="1000" b="0">
               <a:solidFill>
@@ -58314,7 +58317,7 @@
                 </a:solidFill>
                 <a:latin typeface="微软雅黑" panose="020B0502040204020203" charset="-122"/>
               </a:rPr>
-              <a:t>58 / 59</a:t>
+              <a:t>61 / 62</a:t>
             </a:r>
             <a:endParaRPr sz="1000" b="0">
               <a:solidFill>
@@ -59740,7 +59743,7 @@
                 </a:solidFill>
                 <a:latin typeface="微软雅黑" panose="020B0502040204020203" charset="-122"/>
               </a:rPr>
-              <a:t>6 / 59</a:t>
+              <a:t>6 / 62</a:t>
             </a:r>
             <a:endParaRPr sz="1000" b="0">
               <a:solidFill>
@@ -59748,6 +59751,3020 @@
               </a:solidFill>
               <a:latin typeface="微软雅黑" panose="020B0502040204020203" charset="-122"/>
             </a:endParaRPr>
+          </a:p>
+        </p:txBody>
+      </p:sp>
+    </p:spTree>
+  </p:cSld>
+  <p:clrMapOvr>
+    <a:masterClrMapping/>
+  </p:clrMapOvr>
+</p:sld>
+</file>
+
+<file path=ppt/slides/slide60.xml><?xml version="1.0" encoding="utf-8"?>
+<p:sld xmlns:a="http://schemas.openxmlformats.org/drawingml/2006/main" xmlns:p="http://schemas.openxmlformats.org/presentationml/2006/main" xmlns:r="http://schemas.openxmlformats.org/officeDocument/2006/relationships">
+  <p:cSld>
+    <p:spTree>
+      <p:nvGrpSpPr>
+        <p:cNvPr id="1" name=""/>
+        <p:cNvGrpSpPr/>
+        <p:nvPr/>
+      </p:nvGrpSpPr>
+      <p:grpSpPr/>
+      <p:sp>
+        <p:nvSpPr>
+          <p:cNvPr id="2" name="Rounded Rectangle 1"/>
+          <p:cNvSpPr/>
+          <p:nvPr/>
+        </p:nvSpPr>
+        <p:spPr>
+          <a:xfrm>
+            <a:off x="0" y="0"/>
+            <a:ext cx="12191695" cy="64008"/>
+          </a:xfrm>
+          <a:prstGeom prst="roundRect">
+            <a:avLst>
+              <a:gd name="adj" fmla="val 50000"/>
+            </a:avLst>
+          </a:prstGeom>
+          <a:solidFill>
+            <a:srgbClr val="0B5E54"/>
+          </a:solidFill>
+          <a:ln>
+            <a:noFill/>
+          </a:ln>
+          <a:effectLst/>
+        </p:spPr>
+        <p:style>
+          <a:lnRef idx="1">
+            <a:schemeClr val="accent1"/>
+          </a:lnRef>
+          <a:fillRef idx="3">
+            <a:schemeClr val="accent1"/>
+          </a:fillRef>
+          <a:effectRef idx="2">
+            <a:schemeClr val="accent1"/>
+          </a:effectRef>
+          <a:fontRef idx="minor">
+            <a:schemeClr val="lt1"/>
+          </a:fontRef>
+        </p:style>
+        <p:txBody>
+          <a:bodyPr rtlCol="0" anchor="ctr"/>
+          <a:lstStyle/>
+          <a:p>
+            <a:pPr algn="ctr"/>
+          </a:p>
+        </p:txBody>
+      </p:sp>
+      <p:sp>
+        <p:nvSpPr>
+          <p:cNvPr id="3" name="TextBox 2"/>
+          <p:cNvSpPr txBox="1"/>
+          <p:nvPr/>
+        </p:nvSpPr>
+        <p:spPr>
+          <a:xfrm>
+            <a:off x="475488" y="146304"/>
+            <a:ext cx="8229600" cy="292608"/>
+          </a:xfrm>
+          <a:prstGeom prst="rect">
+            <a:avLst/>
+          </a:prstGeom>
+          <a:noFill/>
+        </p:spPr>
+        <p:txBody>
+          <a:bodyPr wrap="square" anchor="t" lIns="0" rIns="0" tIns="0" bIns="0">
+            <a:spAutoFit/>
+          </a:bodyPr>
+          <a:lstStyle/>
+          <a:p>
+            <a:pPr algn="l">
+              <a:lnSpc>
+                <a:spcPct val="114000"/>
+              </a:lnSpc>
+            </a:pPr>
+            <a:r>
+              <a:rPr sz="1100" b="1">
+                <a:solidFill>
+                  <a:srgbClr val="0B5E54"/>
+                </a:solidFill>
+              </a:rPr>
+              <a:t>工单实战 · 本次实跑结果</a:t>
+            </a:r>
+          </a:p>
+        </p:txBody>
+      </p:sp>
+      <p:sp>
+        <p:nvSpPr>
+          <p:cNvPr id="4" name="Rounded Rectangle 3"/>
+          <p:cNvSpPr/>
+          <p:nvPr/>
+        </p:nvSpPr>
+        <p:spPr>
+          <a:xfrm>
+            <a:off x="475488" y="475488"/>
+            <a:ext cx="1881187" cy="310896"/>
+          </a:xfrm>
+          <a:prstGeom prst="roundRect">
+            <a:avLst>
+              <a:gd name="adj" fmla="val 50000"/>
+            </a:avLst>
+          </a:prstGeom>
+          <a:solidFill>
+            <a:srgbClr val="C9A227"/>
+          </a:solidFill>
+          <a:ln>
+            <a:noFill/>
+          </a:ln>
+          <a:effectLst/>
+        </p:spPr>
+        <p:style>
+          <a:lnRef idx="1">
+            <a:schemeClr val="accent1"/>
+          </a:lnRef>
+          <a:fillRef idx="3">
+            <a:schemeClr val="accent1"/>
+          </a:fillRef>
+          <a:effectRef idx="2">
+            <a:schemeClr val="accent1"/>
+          </a:effectRef>
+          <a:fontRef idx="minor">
+            <a:schemeClr val="lt1"/>
+          </a:fontRef>
+        </p:style>
+        <p:txBody>
+          <a:bodyPr rtlCol="0" anchor="ctr"/>
+          <a:lstStyle/>
+          <a:p>
+            <a:pPr algn="ctr"/>
+          </a:p>
+        </p:txBody>
+      </p:sp>
+      <p:sp>
+        <p:nvSpPr>
+          <p:cNvPr id="5" name="TextBox 4"/>
+          <p:cNvSpPr txBox="1"/>
+          <p:nvPr/>
+        </p:nvSpPr>
+        <p:spPr>
+          <a:xfrm>
+            <a:off x="475488" y="475488"/>
+            <a:ext cx="1881187" cy="310896"/>
+          </a:xfrm>
+          <a:prstGeom prst="rect">
+            <a:avLst/>
+          </a:prstGeom>
+          <a:noFill/>
+        </p:spPr>
+        <p:txBody>
+          <a:bodyPr wrap="square" anchor="ctr" lIns="0" rIns="0" tIns="0" bIns="0">
+            <a:spAutoFit/>
+          </a:bodyPr>
+          <a:lstStyle/>
+          <a:p>
+            <a:pPr algn="ctr">
+              <a:lnSpc>
+                <a:spcPct val="114000"/>
+              </a:lnSpc>
+            </a:pPr>
+            <a:r>
+              <a:rPr sz="1050" b="1">
+                <a:solidFill>
+                  <a:srgbClr val="FFFFFF"/>
+                </a:solidFill>
+              </a:rPr>
+              <a:t>REAL RUN · 四档逐字实测</a:t>
+            </a:r>
+          </a:p>
+        </p:txBody>
+      </p:sp>
+      <p:sp>
+        <p:nvSpPr>
+          <p:cNvPr id="6" name="TextBox 5"/>
+          <p:cNvSpPr txBox="1"/>
+          <p:nvPr/>
+        </p:nvSpPr>
+        <p:spPr>
+          <a:xfrm>
+            <a:off x="475488" y="859536"/>
+            <a:ext cx="11237976" cy="502920"/>
+          </a:xfrm>
+          <a:prstGeom prst="rect">
+            <a:avLst/>
+          </a:prstGeom>
+          <a:noFill/>
+        </p:spPr>
+        <p:txBody>
+          <a:bodyPr wrap="square" anchor="t" lIns="0" rIns="0" tIns="0" bIns="0">
+            <a:spAutoFit/>
+          </a:bodyPr>
+          <a:lstStyle/>
+          <a:p>
+            <a:pPr algn="l">
+              <a:lnSpc>
+                <a:spcPct val="114000"/>
+              </a:lnSpc>
+            </a:pPr>
+            <a:r>
+              <a:rPr sz="2200" b="1">
+                <a:solidFill>
+                  <a:srgbClr val="1B2B28"/>
+                </a:solidFill>
+              </a:rPr>
+              <a:t>P4.1 p41_collector_hub：本次 D/C/B/A 四档实测</a:t>
+            </a:r>
+          </a:p>
+        </p:txBody>
+      </p:sp>
+      <p:sp>
+        <p:nvSpPr>
+          <p:cNvPr id="7" name="Rounded Rectangle 6"/>
+          <p:cNvSpPr/>
+          <p:nvPr/>
+        </p:nvSpPr>
+        <p:spPr>
+          <a:xfrm>
+            <a:off x="475488" y="1389888"/>
+            <a:ext cx="1234440" cy="27432"/>
+          </a:xfrm>
+          <a:prstGeom prst="roundRect">
+            <a:avLst>
+              <a:gd name="adj" fmla="val 50000"/>
+            </a:avLst>
+          </a:prstGeom>
+          <a:solidFill>
+            <a:srgbClr val="C9A227"/>
+          </a:solidFill>
+          <a:ln>
+            <a:noFill/>
+          </a:ln>
+          <a:effectLst/>
+        </p:spPr>
+        <p:style>
+          <a:lnRef idx="1">
+            <a:schemeClr val="accent1"/>
+          </a:lnRef>
+          <a:fillRef idx="3">
+            <a:schemeClr val="accent1"/>
+          </a:fillRef>
+          <a:effectRef idx="2">
+            <a:schemeClr val="accent1"/>
+          </a:effectRef>
+          <a:fontRef idx="minor">
+            <a:schemeClr val="lt1"/>
+          </a:fontRef>
+        </p:style>
+        <p:txBody>
+          <a:bodyPr rtlCol="0" anchor="ctr"/>
+          <a:lstStyle/>
+          <a:p>
+            <a:pPr algn="ctr"/>
+          </a:p>
+        </p:txBody>
+      </p:sp>
+      <p:sp>
+        <p:nvSpPr>
+          <p:cNvPr id="8" name="Rounded Rectangle 7"/>
+          <p:cNvSpPr/>
+          <p:nvPr/>
+        </p:nvSpPr>
+        <p:spPr>
+          <a:xfrm>
+            <a:off x="475488" y="6419088"/>
+            <a:ext cx="11237976" cy="10972"/>
+          </a:xfrm>
+          <a:prstGeom prst="roundRect">
+            <a:avLst>
+              <a:gd name="adj" fmla="val 50000"/>
+            </a:avLst>
+          </a:prstGeom>
+          <a:solidFill>
+            <a:srgbClr val="E4F1EE"/>
+          </a:solidFill>
+          <a:ln>
+            <a:noFill/>
+          </a:ln>
+          <a:effectLst/>
+        </p:spPr>
+        <p:style>
+          <a:lnRef idx="1">
+            <a:schemeClr val="accent1"/>
+          </a:lnRef>
+          <a:fillRef idx="3">
+            <a:schemeClr val="accent1"/>
+          </a:fillRef>
+          <a:effectRef idx="2">
+            <a:schemeClr val="accent1"/>
+          </a:effectRef>
+          <a:fontRef idx="minor">
+            <a:schemeClr val="lt1"/>
+          </a:fontRef>
+        </p:style>
+        <p:txBody>
+          <a:bodyPr rtlCol="0" anchor="ctr"/>
+          <a:lstStyle/>
+          <a:p>
+            <a:pPr algn="ctr"/>
+          </a:p>
+        </p:txBody>
+      </p:sp>
+      <p:sp>
+        <p:nvSpPr>
+          <p:cNvPr id="9" name="TextBox 8"/>
+          <p:cNvSpPr txBox="1"/>
+          <p:nvPr/>
+        </p:nvSpPr>
+        <p:spPr>
+          <a:xfrm>
+            <a:off x="475488" y="6455664"/>
+            <a:ext cx="7315200" cy="292608"/>
+          </a:xfrm>
+          <a:prstGeom prst="rect">
+            <a:avLst/>
+          </a:prstGeom>
+          <a:noFill/>
+        </p:spPr>
+        <p:txBody>
+          <a:bodyPr wrap="square" anchor="t" lIns="0" rIns="0" tIns="0" bIns="0">
+            <a:spAutoFit/>
+          </a:bodyPr>
+          <a:lstStyle/>
+          <a:p>
+            <a:pPr algn="l">
+              <a:lnSpc>
+                <a:spcPct val="114000"/>
+              </a:lnSpc>
+            </a:pPr>
+            <a:r>
+              <a:rPr sz="900" b="0">
+                <a:solidFill>
+                  <a:srgbClr val="5C6E6A"/>
+                </a:solidFill>
+              </a:rPr>
+              <a:t>两江智造集团 · Python程序设计（项目实战）</a:t>
+            </a:r>
+          </a:p>
+        </p:txBody>
+      </p:sp>
+      <p:sp>
+        <p:nvSpPr>
+          <p:cNvPr id="10" name="TextBox 9"/>
+          <p:cNvSpPr txBox="1"/>
+          <p:nvPr/>
+        </p:nvSpPr>
+        <p:spPr>
+          <a:xfrm>
+            <a:off x="10597896" y="6537960"/>
+            <a:ext cx="996696" cy="301752"/>
+          </a:xfrm>
+          <a:prstGeom prst="rect">
+            <a:avLst/>
+          </a:prstGeom>
+          <a:noFill/>
+        </p:spPr>
+        <p:txBody>
+          <a:bodyPr wrap="square" anchor="t" lIns="0" rIns="0" tIns="0" bIns="0">
+            <a:spAutoFit/>
+          </a:bodyPr>
+          <a:lstStyle/>
+          <a:p>
+            <a:pPr algn="r">
+              <a:lnSpc>
+                <a:spcPct val="114000"/>
+              </a:lnSpc>
+            </a:pPr>
+            <a:r>
+              <a:rPr sz="1000" b="0">
+                <a:solidFill>
+                  <a:srgbClr val="8A97B5"/>
+                </a:solidFill>
+              </a:rPr>
+              <a:t>45 / 62</a:t>
+            </a:r>
+          </a:p>
+        </p:txBody>
+      </p:sp>
+      <p:sp>
+        <p:nvSpPr>
+          <p:cNvPr id="11" name="Rounded Rectangle 10"/>
+          <p:cNvSpPr/>
+          <p:nvPr/>
+        </p:nvSpPr>
+        <p:spPr>
+          <a:xfrm>
+            <a:off x="475488" y="1554480"/>
+            <a:ext cx="11237976" cy="916686"/>
+          </a:xfrm>
+          <a:prstGeom prst="roundRect">
+            <a:avLst>
+              <a:gd name="adj" fmla="val 6000"/>
+            </a:avLst>
+          </a:prstGeom>
+          <a:solidFill>
+            <a:srgbClr val="FFFFFF"/>
+          </a:solidFill>
+          <a:ln w="9525">
+            <a:solidFill>
+              <a:srgbClr val="E4F1EE"/>
+            </a:solidFill>
+          </a:ln>
+          <a:effectLst/>
+        </p:spPr>
+        <p:style>
+          <a:lnRef idx="1">
+            <a:schemeClr val="accent1"/>
+          </a:lnRef>
+          <a:fillRef idx="3">
+            <a:schemeClr val="accent1"/>
+          </a:fillRef>
+          <a:effectRef idx="2">
+            <a:schemeClr val="accent1"/>
+          </a:effectRef>
+          <a:fontRef idx="minor">
+            <a:schemeClr val="lt1"/>
+          </a:fontRef>
+        </p:style>
+        <p:txBody>
+          <a:bodyPr rtlCol="0" anchor="ctr"/>
+          <a:lstStyle/>
+          <a:p>
+            <a:pPr algn="ctr"/>
+          </a:p>
+        </p:txBody>
+      </p:sp>
+      <p:sp>
+        <p:nvSpPr>
+          <p:cNvPr id="12" name="Rounded Rectangle 11"/>
+          <p:cNvSpPr/>
+          <p:nvPr/>
+        </p:nvSpPr>
+        <p:spPr>
+          <a:xfrm>
+            <a:off x="475488" y="1554480"/>
+            <a:ext cx="54864" cy="916686"/>
+          </a:xfrm>
+          <a:prstGeom prst="roundRect">
+            <a:avLst>
+              <a:gd name="adj" fmla="val 50000"/>
+            </a:avLst>
+          </a:prstGeom>
+          <a:solidFill>
+            <a:srgbClr val="5C6E6A"/>
+          </a:solidFill>
+          <a:ln>
+            <a:noFill/>
+          </a:ln>
+          <a:effectLst/>
+        </p:spPr>
+        <p:style>
+          <a:lnRef idx="1">
+            <a:schemeClr val="accent1"/>
+          </a:lnRef>
+          <a:fillRef idx="3">
+            <a:schemeClr val="accent1"/>
+          </a:fillRef>
+          <a:effectRef idx="2">
+            <a:schemeClr val="accent1"/>
+          </a:effectRef>
+          <a:fontRef idx="minor">
+            <a:schemeClr val="lt1"/>
+          </a:fontRef>
+        </p:style>
+        <p:txBody>
+          <a:bodyPr rtlCol="0" anchor="ctr"/>
+          <a:lstStyle/>
+          <a:p>
+            <a:pPr algn="ctr"/>
+          </a:p>
+        </p:txBody>
+      </p:sp>
+      <p:sp>
+        <p:nvSpPr>
+          <p:cNvPr id="13" name="Rounded Rectangle 12"/>
+          <p:cNvSpPr/>
+          <p:nvPr/>
+        </p:nvSpPr>
+        <p:spPr>
+          <a:xfrm>
+            <a:off x="621792" y="1636776"/>
+            <a:ext cx="237744" cy="237744"/>
+          </a:xfrm>
+          <a:prstGeom prst="roundRect">
+            <a:avLst>
+              <a:gd name="adj" fmla="val 28000"/>
+            </a:avLst>
+          </a:prstGeom>
+          <a:solidFill>
+            <a:srgbClr val="5C6E6A"/>
+          </a:solidFill>
+          <a:ln>
+            <a:noFill/>
+          </a:ln>
+          <a:effectLst/>
+        </p:spPr>
+        <p:style>
+          <a:lnRef idx="1">
+            <a:schemeClr val="accent1"/>
+          </a:lnRef>
+          <a:fillRef idx="3">
+            <a:schemeClr val="accent1"/>
+          </a:fillRef>
+          <a:effectRef idx="2">
+            <a:schemeClr val="accent1"/>
+          </a:effectRef>
+          <a:fontRef idx="minor">
+            <a:schemeClr val="lt1"/>
+          </a:fontRef>
+        </p:style>
+        <p:txBody>
+          <a:bodyPr rtlCol="0" anchor="ctr"/>
+          <a:lstStyle/>
+          <a:p>
+            <a:pPr algn="ctr"/>
+          </a:p>
+        </p:txBody>
+      </p:sp>
+      <p:sp>
+        <p:nvSpPr>
+          <p:cNvPr id="14" name="TextBox 13"/>
+          <p:cNvSpPr txBox="1"/>
+          <p:nvPr/>
+        </p:nvSpPr>
+        <p:spPr>
+          <a:xfrm>
+            <a:off x="621792" y="1636776"/>
+            <a:ext cx="237744" cy="237744"/>
+          </a:xfrm>
+          <a:prstGeom prst="rect">
+            <a:avLst/>
+          </a:prstGeom>
+          <a:noFill/>
+        </p:spPr>
+        <p:txBody>
+          <a:bodyPr wrap="square" anchor="ctr" lIns="0" rIns="0" tIns="0" bIns="0">
+            <a:spAutoFit/>
+          </a:bodyPr>
+          <a:lstStyle/>
+          <a:p>
+            <a:pPr algn="ctr">
+              <a:lnSpc>
+                <a:spcPct val="114000"/>
+              </a:lnSpc>
+            </a:pPr>
+            <a:r>
+              <a:rPr sz="1000" b="1">
+                <a:solidFill>
+                  <a:srgbClr val="FFFFFF"/>
+                </a:solidFill>
+              </a:rPr>
+              <a:t>D</a:t>
+            </a:r>
+          </a:p>
+        </p:txBody>
+      </p:sp>
+      <p:sp>
+        <p:nvSpPr>
+          <p:cNvPr id="15" name="TextBox 14"/>
+          <p:cNvSpPr txBox="1"/>
+          <p:nvPr/>
+        </p:nvSpPr>
+        <p:spPr>
+          <a:xfrm>
+            <a:off x="932688" y="1618488"/>
+            <a:ext cx="8778240" cy="274320"/>
+          </a:xfrm>
+          <a:prstGeom prst="rect">
+            <a:avLst/>
+          </a:prstGeom>
+          <a:noFill/>
+        </p:spPr>
+        <p:txBody>
+          <a:bodyPr wrap="square" anchor="ctr" lIns="0" rIns="0" tIns="0" bIns="0">
+            <a:spAutoFit/>
+          </a:bodyPr>
+          <a:lstStyle/>
+          <a:p>
+            <a:pPr algn="l">
+              <a:lnSpc>
+                <a:spcPct val="114000"/>
+              </a:lnSpc>
+            </a:pPr>
+            <a:r>
+              <a:rPr sz="1050" b="1">
+                <a:solidFill>
+                  <a:srgbClr val="1B2B28"/>
+                </a:solidFill>
+              </a:rPr>
+              <a:t>及格</a:t>
+            </a:r>
+            <a:r>
+              <a:rPr sz="850" b="0">
+                <a:solidFill>
+                  <a:srgbClr val="5C6E6A"/>
+                </a:solidFill>
+              </a:rPr>
+              <a:t>   验收口径：</a:t>
+            </a:r>
+            <a:r>
+              <a:rPr sz="850" b="0">
+                <a:solidFill>
+                  <a:srgbClr val="5C6E6A"/>
+                </a:solidFill>
+              </a:rPr>
+              <a:t>三源数据贯通；采集率&gt;95%；无数据丢失；系统文档</a:t>
+            </a:r>
+          </a:p>
+        </p:txBody>
+      </p:sp>
+      <p:sp>
+        <p:nvSpPr>
+          <p:cNvPr id="16" name="Rounded Rectangle 15"/>
+          <p:cNvSpPr/>
+          <p:nvPr/>
+        </p:nvSpPr>
+        <p:spPr>
+          <a:xfrm>
+            <a:off x="11131803" y="1645920"/>
+            <a:ext cx="453644" cy="237744"/>
+          </a:xfrm>
+          <a:prstGeom prst="roundRect">
+            <a:avLst>
+              <a:gd name="adj" fmla="val 50000"/>
+            </a:avLst>
+          </a:prstGeom>
+          <a:solidFill>
+            <a:srgbClr val="0B5E54"/>
+          </a:solidFill>
+          <a:ln>
+            <a:noFill/>
+          </a:ln>
+          <a:effectLst/>
+        </p:spPr>
+        <p:style>
+          <a:lnRef idx="1">
+            <a:schemeClr val="accent1"/>
+          </a:lnRef>
+          <a:fillRef idx="3">
+            <a:schemeClr val="accent1"/>
+          </a:fillRef>
+          <a:effectRef idx="2">
+            <a:schemeClr val="accent1"/>
+          </a:effectRef>
+          <a:fontRef idx="minor">
+            <a:schemeClr val="lt1"/>
+          </a:fontRef>
+        </p:style>
+        <p:txBody>
+          <a:bodyPr rtlCol="0" anchor="ctr"/>
+          <a:lstStyle/>
+          <a:p>
+            <a:pPr algn="ctr"/>
+          </a:p>
+        </p:txBody>
+      </p:sp>
+      <p:sp>
+        <p:nvSpPr>
+          <p:cNvPr id="17" name="TextBox 16"/>
+          <p:cNvSpPr txBox="1"/>
+          <p:nvPr/>
+        </p:nvSpPr>
+        <p:spPr>
+          <a:xfrm>
+            <a:off x="11131803" y="1645920"/>
+            <a:ext cx="453644" cy="237744"/>
+          </a:xfrm>
+          <a:prstGeom prst="rect">
+            <a:avLst/>
+          </a:prstGeom>
+          <a:noFill/>
+        </p:spPr>
+        <p:txBody>
+          <a:bodyPr wrap="square" anchor="ctr" lIns="0" rIns="0" tIns="0" bIns="0">
+            <a:spAutoFit/>
+          </a:bodyPr>
+          <a:lstStyle/>
+          <a:p>
+            <a:pPr algn="ctr">
+              <a:lnSpc>
+                <a:spcPct val="114000"/>
+              </a:lnSpc>
+            </a:pPr>
+            <a:r>
+              <a:rPr sz="850" b="1">
+                <a:solidFill>
+                  <a:srgbClr val="FFFFFF"/>
+                </a:solidFill>
+              </a:rPr>
+              <a:t>达标</a:t>
+            </a:r>
+          </a:p>
+        </p:txBody>
+      </p:sp>
+      <p:sp>
+        <p:nvSpPr>
+          <p:cNvPr id="18" name="TextBox 17"/>
+          <p:cNvSpPr txBox="1"/>
+          <p:nvPr/>
+        </p:nvSpPr>
+        <p:spPr>
+          <a:xfrm>
+            <a:off x="932688" y="1901952"/>
+            <a:ext cx="10671047" cy="514350"/>
+          </a:xfrm>
+          <a:prstGeom prst="rect">
+            <a:avLst/>
+          </a:prstGeom>
+          <a:noFill/>
+        </p:spPr>
+        <p:txBody>
+          <a:bodyPr wrap="square" anchor="t" lIns="0" rIns="0" tIns="0" bIns="0">
+            <a:spAutoFit/>
+          </a:bodyPr>
+          <a:lstStyle/>
+          <a:p>
+            <a:pPr algn="l">
+              <a:lnSpc>
+                <a:spcPct val="114000"/>
+              </a:lnSpc>
+            </a:pPr>
+            <a:r>
+              <a:rPr sz="950" b="0">
+                <a:solidFill>
+                  <a:srgbClr val="1B2B28"/>
+                </a:solidFill>
+              </a:rPr>
+              <a:t>3/3 源各有成功读数｜默认链路采集率 97.22%（工单线 &gt;95.00%）｜重连上限抬到 4 次的零丢弃链路: 成功 36 丢弃 0｜成功+丢弃=计划恒等 通过｜docs/ 有效过程文档 8 篇（≥8 且每篇 &gt;200B）</a:t>
+            </a:r>
+          </a:p>
+        </p:txBody>
+      </p:sp>
+      <p:sp>
+        <p:nvSpPr>
+          <p:cNvPr id="19" name="Rounded Rectangle 18"/>
+          <p:cNvSpPr/>
+          <p:nvPr/>
+        </p:nvSpPr>
+        <p:spPr>
+          <a:xfrm>
+            <a:off x="475488" y="2535174"/>
+            <a:ext cx="11237976" cy="916686"/>
+          </a:xfrm>
+          <a:prstGeom prst="roundRect">
+            <a:avLst>
+              <a:gd name="adj" fmla="val 6000"/>
+            </a:avLst>
+          </a:prstGeom>
+          <a:solidFill>
+            <a:srgbClr val="FFFFFF"/>
+          </a:solidFill>
+          <a:ln w="9525">
+            <a:solidFill>
+              <a:srgbClr val="E4F1EE"/>
+            </a:solidFill>
+          </a:ln>
+          <a:effectLst/>
+        </p:spPr>
+        <p:style>
+          <a:lnRef idx="1">
+            <a:schemeClr val="accent1"/>
+          </a:lnRef>
+          <a:fillRef idx="3">
+            <a:schemeClr val="accent1"/>
+          </a:fillRef>
+          <a:effectRef idx="2">
+            <a:schemeClr val="accent1"/>
+          </a:effectRef>
+          <a:fontRef idx="minor">
+            <a:schemeClr val="lt1"/>
+          </a:fontRef>
+        </p:style>
+        <p:txBody>
+          <a:bodyPr rtlCol="0" anchor="ctr"/>
+          <a:lstStyle/>
+          <a:p>
+            <a:pPr algn="ctr"/>
+          </a:p>
+        </p:txBody>
+      </p:sp>
+      <p:sp>
+        <p:nvSpPr>
+          <p:cNvPr id="20" name="Rounded Rectangle 19"/>
+          <p:cNvSpPr/>
+          <p:nvPr/>
+        </p:nvSpPr>
+        <p:spPr>
+          <a:xfrm>
+            <a:off x="475488" y="2535174"/>
+            <a:ext cx="54864" cy="916686"/>
+          </a:xfrm>
+          <a:prstGeom prst="roundRect">
+            <a:avLst>
+              <a:gd name="adj" fmla="val 50000"/>
+            </a:avLst>
+          </a:prstGeom>
+          <a:solidFill>
+            <a:srgbClr val="157A6D"/>
+          </a:solidFill>
+          <a:ln>
+            <a:noFill/>
+          </a:ln>
+          <a:effectLst/>
+        </p:spPr>
+        <p:style>
+          <a:lnRef idx="1">
+            <a:schemeClr val="accent1"/>
+          </a:lnRef>
+          <a:fillRef idx="3">
+            <a:schemeClr val="accent1"/>
+          </a:fillRef>
+          <a:effectRef idx="2">
+            <a:schemeClr val="accent1"/>
+          </a:effectRef>
+          <a:fontRef idx="minor">
+            <a:schemeClr val="lt1"/>
+          </a:fontRef>
+        </p:style>
+        <p:txBody>
+          <a:bodyPr rtlCol="0" anchor="ctr"/>
+          <a:lstStyle/>
+          <a:p>
+            <a:pPr algn="ctr"/>
+          </a:p>
+        </p:txBody>
+      </p:sp>
+      <p:sp>
+        <p:nvSpPr>
+          <p:cNvPr id="21" name="Rounded Rectangle 20"/>
+          <p:cNvSpPr/>
+          <p:nvPr/>
+        </p:nvSpPr>
+        <p:spPr>
+          <a:xfrm>
+            <a:off x="621792" y="2617470"/>
+            <a:ext cx="237744" cy="237744"/>
+          </a:xfrm>
+          <a:prstGeom prst="roundRect">
+            <a:avLst>
+              <a:gd name="adj" fmla="val 28000"/>
+            </a:avLst>
+          </a:prstGeom>
+          <a:solidFill>
+            <a:srgbClr val="157A6D"/>
+          </a:solidFill>
+          <a:ln>
+            <a:noFill/>
+          </a:ln>
+          <a:effectLst/>
+        </p:spPr>
+        <p:style>
+          <a:lnRef idx="1">
+            <a:schemeClr val="accent1"/>
+          </a:lnRef>
+          <a:fillRef idx="3">
+            <a:schemeClr val="accent1"/>
+          </a:fillRef>
+          <a:effectRef idx="2">
+            <a:schemeClr val="accent1"/>
+          </a:effectRef>
+          <a:fontRef idx="minor">
+            <a:schemeClr val="lt1"/>
+          </a:fontRef>
+        </p:style>
+        <p:txBody>
+          <a:bodyPr rtlCol="0" anchor="ctr"/>
+          <a:lstStyle/>
+          <a:p>
+            <a:pPr algn="ctr"/>
+          </a:p>
+        </p:txBody>
+      </p:sp>
+      <p:sp>
+        <p:nvSpPr>
+          <p:cNvPr id="22" name="TextBox 21"/>
+          <p:cNvSpPr txBox="1"/>
+          <p:nvPr/>
+        </p:nvSpPr>
+        <p:spPr>
+          <a:xfrm>
+            <a:off x="621792" y="2617470"/>
+            <a:ext cx="237744" cy="237744"/>
+          </a:xfrm>
+          <a:prstGeom prst="rect">
+            <a:avLst/>
+          </a:prstGeom>
+          <a:noFill/>
+        </p:spPr>
+        <p:txBody>
+          <a:bodyPr wrap="square" anchor="ctr" lIns="0" rIns="0" tIns="0" bIns="0">
+            <a:spAutoFit/>
+          </a:bodyPr>
+          <a:lstStyle/>
+          <a:p>
+            <a:pPr algn="ctr">
+              <a:lnSpc>
+                <a:spcPct val="114000"/>
+              </a:lnSpc>
+            </a:pPr>
+            <a:r>
+              <a:rPr sz="1000" b="1">
+                <a:solidFill>
+                  <a:srgbClr val="FFFFFF"/>
+                </a:solidFill>
+              </a:rPr>
+              <a:t>C</a:t>
+            </a:r>
+          </a:p>
+        </p:txBody>
+      </p:sp>
+      <p:sp>
+        <p:nvSpPr>
+          <p:cNvPr id="23" name="TextBox 22"/>
+          <p:cNvSpPr txBox="1"/>
+          <p:nvPr/>
+        </p:nvSpPr>
+        <p:spPr>
+          <a:xfrm>
+            <a:off x="932688" y="2599182"/>
+            <a:ext cx="8778240" cy="274320"/>
+          </a:xfrm>
+          <a:prstGeom prst="rect">
+            <a:avLst/>
+          </a:prstGeom>
+          <a:noFill/>
+        </p:spPr>
+        <p:txBody>
+          <a:bodyPr wrap="square" anchor="ctr" lIns="0" rIns="0" tIns="0" bIns="0">
+            <a:spAutoFit/>
+          </a:bodyPr>
+          <a:lstStyle/>
+          <a:p>
+            <a:pPr algn="l">
+              <a:lnSpc>
+                <a:spcPct val="114000"/>
+              </a:lnSpc>
+            </a:pPr>
+            <a:r>
+              <a:rPr sz="1050" b="1">
+                <a:solidFill>
+                  <a:srgbClr val="1B2B28"/>
+                </a:solidFill>
+              </a:rPr>
+              <a:t>良好</a:t>
+            </a:r>
+            <a:r>
+              <a:rPr sz="850" b="0">
+                <a:solidFill>
+                  <a:srgbClr val="5C6E6A"/>
+                </a:solidFill>
+              </a:rPr>
+              <a:t>   验收口径：</a:t>
+            </a:r>
+            <a:r>
+              <a:rPr sz="850" b="0">
+                <a:solidFill>
+                  <a:srgbClr val="5C6E6A"/>
+                </a:solidFill>
+              </a:rPr>
+              <a:t>断线重连实测通过；统计输出准确</a:t>
+            </a:r>
+          </a:p>
+        </p:txBody>
+      </p:sp>
+      <p:sp>
+        <p:nvSpPr>
+          <p:cNvPr id="24" name="Rounded Rectangle 23"/>
+          <p:cNvSpPr/>
+          <p:nvPr/>
+        </p:nvSpPr>
+        <p:spPr>
+          <a:xfrm>
+            <a:off x="11131803" y="2626614"/>
+            <a:ext cx="453644" cy="237744"/>
+          </a:xfrm>
+          <a:prstGeom prst="roundRect">
+            <a:avLst>
+              <a:gd name="adj" fmla="val 50000"/>
+            </a:avLst>
+          </a:prstGeom>
+          <a:solidFill>
+            <a:srgbClr val="0B5E54"/>
+          </a:solidFill>
+          <a:ln>
+            <a:noFill/>
+          </a:ln>
+          <a:effectLst/>
+        </p:spPr>
+        <p:style>
+          <a:lnRef idx="1">
+            <a:schemeClr val="accent1"/>
+          </a:lnRef>
+          <a:fillRef idx="3">
+            <a:schemeClr val="accent1"/>
+          </a:fillRef>
+          <a:effectRef idx="2">
+            <a:schemeClr val="accent1"/>
+          </a:effectRef>
+          <a:fontRef idx="minor">
+            <a:schemeClr val="lt1"/>
+          </a:fontRef>
+        </p:style>
+        <p:txBody>
+          <a:bodyPr rtlCol="0" anchor="ctr"/>
+          <a:lstStyle/>
+          <a:p>
+            <a:pPr algn="ctr"/>
+          </a:p>
+        </p:txBody>
+      </p:sp>
+      <p:sp>
+        <p:nvSpPr>
+          <p:cNvPr id="25" name="TextBox 24"/>
+          <p:cNvSpPr txBox="1"/>
+          <p:nvPr/>
+        </p:nvSpPr>
+        <p:spPr>
+          <a:xfrm>
+            <a:off x="11131803" y="2626614"/>
+            <a:ext cx="453644" cy="237744"/>
+          </a:xfrm>
+          <a:prstGeom prst="rect">
+            <a:avLst/>
+          </a:prstGeom>
+          <a:noFill/>
+        </p:spPr>
+        <p:txBody>
+          <a:bodyPr wrap="square" anchor="ctr" lIns="0" rIns="0" tIns="0" bIns="0">
+            <a:spAutoFit/>
+          </a:bodyPr>
+          <a:lstStyle/>
+          <a:p>
+            <a:pPr algn="ctr">
+              <a:lnSpc>
+                <a:spcPct val="114000"/>
+              </a:lnSpc>
+            </a:pPr>
+            <a:r>
+              <a:rPr sz="850" b="1">
+                <a:solidFill>
+                  <a:srgbClr val="FFFFFF"/>
+                </a:solidFill>
+              </a:rPr>
+              <a:t>达标</a:t>
+            </a:r>
+          </a:p>
+        </p:txBody>
+      </p:sp>
+      <p:sp>
+        <p:nvSpPr>
+          <p:cNvPr id="26" name="TextBox 25"/>
+          <p:cNvSpPr txBox="1"/>
+          <p:nvPr/>
+        </p:nvSpPr>
+        <p:spPr>
+          <a:xfrm>
+            <a:off x="932688" y="2882646"/>
+            <a:ext cx="10671047" cy="514350"/>
+          </a:xfrm>
+          <a:prstGeom prst="rect">
+            <a:avLst/>
+          </a:prstGeom>
+          <a:noFill/>
+        </p:spPr>
+        <p:txBody>
+          <a:bodyPr wrap="square" anchor="t" lIns="0" rIns="0" tIns="0" bIns="0">
+            <a:spAutoFit/>
+          </a:bodyPr>
+          <a:lstStyle/>
+          <a:p>
+            <a:pPr algn="l">
+              <a:lnSpc>
+                <a:spcPct val="114000"/>
+              </a:lnSpc>
+            </a:pPr>
+            <a:r>
+              <a:rPr sz="950" b="0">
+                <a:solidFill>
+                  <a:srgbClr val="1B2B28"/>
+                </a:solidFill>
+              </a:rPr>
+              <a:t>同一份故障注入下不重连丢 3 条 → 重连丢 1 条（重连 7 次、挽回 2 条）｜分源计划之和 36 = 总计划 36｜计数自洽（调用=成功+丢弃+重试）通过</a:t>
+            </a:r>
+          </a:p>
+        </p:txBody>
+      </p:sp>
+      <p:sp>
+        <p:nvSpPr>
+          <p:cNvPr id="27" name="Rounded Rectangle 26"/>
+          <p:cNvSpPr/>
+          <p:nvPr/>
+        </p:nvSpPr>
+        <p:spPr>
+          <a:xfrm>
+            <a:off x="475488" y="3515868"/>
+            <a:ext cx="11237976" cy="916686"/>
+          </a:xfrm>
+          <a:prstGeom prst="roundRect">
+            <a:avLst>
+              <a:gd name="adj" fmla="val 6000"/>
+            </a:avLst>
+          </a:prstGeom>
+          <a:solidFill>
+            <a:srgbClr val="FFFFFF"/>
+          </a:solidFill>
+          <a:ln w="9525">
+            <a:solidFill>
+              <a:srgbClr val="E4F1EE"/>
+            </a:solidFill>
+          </a:ln>
+          <a:effectLst/>
+        </p:spPr>
+        <p:style>
+          <a:lnRef idx="1">
+            <a:schemeClr val="accent1"/>
+          </a:lnRef>
+          <a:fillRef idx="3">
+            <a:schemeClr val="accent1"/>
+          </a:fillRef>
+          <a:effectRef idx="2">
+            <a:schemeClr val="accent1"/>
+          </a:effectRef>
+          <a:fontRef idx="minor">
+            <a:schemeClr val="lt1"/>
+          </a:fontRef>
+        </p:style>
+        <p:txBody>
+          <a:bodyPr rtlCol="0" anchor="ctr"/>
+          <a:lstStyle/>
+          <a:p>
+            <a:pPr algn="ctr"/>
+          </a:p>
+        </p:txBody>
+      </p:sp>
+      <p:sp>
+        <p:nvSpPr>
+          <p:cNvPr id="28" name="Rounded Rectangle 27"/>
+          <p:cNvSpPr/>
+          <p:nvPr/>
+        </p:nvSpPr>
+        <p:spPr>
+          <a:xfrm>
+            <a:off x="475488" y="3515868"/>
+            <a:ext cx="54864" cy="916686"/>
+          </a:xfrm>
+          <a:prstGeom prst="roundRect">
+            <a:avLst>
+              <a:gd name="adj" fmla="val 50000"/>
+            </a:avLst>
+          </a:prstGeom>
+          <a:solidFill>
+            <a:srgbClr val="0B5E54"/>
+          </a:solidFill>
+          <a:ln>
+            <a:noFill/>
+          </a:ln>
+          <a:effectLst/>
+        </p:spPr>
+        <p:style>
+          <a:lnRef idx="1">
+            <a:schemeClr val="accent1"/>
+          </a:lnRef>
+          <a:fillRef idx="3">
+            <a:schemeClr val="accent1"/>
+          </a:fillRef>
+          <a:effectRef idx="2">
+            <a:schemeClr val="accent1"/>
+          </a:effectRef>
+          <a:fontRef idx="minor">
+            <a:schemeClr val="lt1"/>
+          </a:fontRef>
+        </p:style>
+        <p:txBody>
+          <a:bodyPr rtlCol="0" anchor="ctr"/>
+          <a:lstStyle/>
+          <a:p>
+            <a:pPr algn="ctr"/>
+          </a:p>
+        </p:txBody>
+      </p:sp>
+      <p:sp>
+        <p:nvSpPr>
+          <p:cNvPr id="29" name="Rounded Rectangle 28"/>
+          <p:cNvSpPr/>
+          <p:nvPr/>
+        </p:nvSpPr>
+        <p:spPr>
+          <a:xfrm>
+            <a:off x="621792" y="3598163"/>
+            <a:ext cx="237744" cy="237744"/>
+          </a:xfrm>
+          <a:prstGeom prst="roundRect">
+            <a:avLst>
+              <a:gd name="adj" fmla="val 28000"/>
+            </a:avLst>
+          </a:prstGeom>
+          <a:solidFill>
+            <a:srgbClr val="0B5E54"/>
+          </a:solidFill>
+          <a:ln>
+            <a:noFill/>
+          </a:ln>
+          <a:effectLst/>
+        </p:spPr>
+        <p:style>
+          <a:lnRef idx="1">
+            <a:schemeClr val="accent1"/>
+          </a:lnRef>
+          <a:fillRef idx="3">
+            <a:schemeClr val="accent1"/>
+          </a:fillRef>
+          <a:effectRef idx="2">
+            <a:schemeClr val="accent1"/>
+          </a:effectRef>
+          <a:fontRef idx="minor">
+            <a:schemeClr val="lt1"/>
+          </a:fontRef>
+        </p:style>
+        <p:txBody>
+          <a:bodyPr rtlCol="0" anchor="ctr"/>
+          <a:lstStyle/>
+          <a:p>
+            <a:pPr algn="ctr"/>
+          </a:p>
+        </p:txBody>
+      </p:sp>
+      <p:sp>
+        <p:nvSpPr>
+          <p:cNvPr id="30" name="TextBox 29"/>
+          <p:cNvSpPr txBox="1"/>
+          <p:nvPr/>
+        </p:nvSpPr>
+        <p:spPr>
+          <a:xfrm>
+            <a:off x="621792" y="3598163"/>
+            <a:ext cx="237744" cy="237744"/>
+          </a:xfrm>
+          <a:prstGeom prst="rect">
+            <a:avLst/>
+          </a:prstGeom>
+          <a:noFill/>
+        </p:spPr>
+        <p:txBody>
+          <a:bodyPr wrap="square" anchor="ctr" lIns="0" rIns="0" tIns="0" bIns="0">
+            <a:spAutoFit/>
+          </a:bodyPr>
+          <a:lstStyle/>
+          <a:p>
+            <a:pPr algn="ctr">
+              <a:lnSpc>
+                <a:spcPct val="114000"/>
+              </a:lnSpc>
+            </a:pPr>
+            <a:r>
+              <a:rPr sz="1000" b="1">
+                <a:solidFill>
+                  <a:srgbClr val="FFFFFF"/>
+                </a:solidFill>
+              </a:rPr>
+              <a:t>B</a:t>
+            </a:r>
+          </a:p>
+        </p:txBody>
+      </p:sp>
+      <p:sp>
+        <p:nvSpPr>
+          <p:cNvPr id="31" name="TextBox 30"/>
+          <p:cNvSpPr txBox="1"/>
+          <p:nvPr/>
+        </p:nvSpPr>
+        <p:spPr>
+          <a:xfrm>
+            <a:off x="932688" y="3579875"/>
+            <a:ext cx="8778240" cy="274320"/>
+          </a:xfrm>
+          <a:prstGeom prst="rect">
+            <a:avLst/>
+          </a:prstGeom>
+          <a:noFill/>
+        </p:spPr>
+        <p:txBody>
+          <a:bodyPr wrap="square" anchor="ctr" lIns="0" rIns="0" tIns="0" bIns="0">
+            <a:spAutoFit/>
+          </a:bodyPr>
+          <a:lstStyle/>
+          <a:p>
+            <a:pPr algn="l">
+              <a:lnSpc>
+                <a:spcPct val="114000"/>
+              </a:lnSpc>
+            </a:pPr>
+            <a:r>
+              <a:rPr sz="1050" b="1">
+                <a:solidFill>
+                  <a:srgbClr val="1B2B28"/>
+                </a:solidFill>
+              </a:rPr>
+              <a:t>优秀</a:t>
+            </a:r>
+            <a:r>
+              <a:rPr sz="850" b="0">
+                <a:solidFill>
+                  <a:srgbClr val="5C6E6A"/>
+                </a:solidFill>
+              </a:rPr>
+              <a:t>   验收口径：</a:t>
+            </a:r>
+            <a:r>
+              <a:rPr sz="850" b="0">
+                <a:solidFill>
+                  <a:srgbClr val="5C6E6A"/>
+                </a:solidFill>
+              </a:rPr>
+              <a:t>采集率≥99.5%；延迟&lt;100ms；线程安全(无共享可变状态)</a:t>
+            </a:r>
+          </a:p>
+        </p:txBody>
+      </p:sp>
+      <p:sp>
+        <p:nvSpPr>
+          <p:cNvPr id="32" name="Rounded Rectangle 31"/>
+          <p:cNvSpPr/>
+          <p:nvPr/>
+        </p:nvSpPr>
+        <p:spPr>
+          <a:xfrm>
+            <a:off x="11131803" y="3607308"/>
+            <a:ext cx="453644" cy="237744"/>
+          </a:xfrm>
+          <a:prstGeom prst="roundRect">
+            <a:avLst>
+              <a:gd name="adj" fmla="val 50000"/>
+            </a:avLst>
+          </a:prstGeom>
+          <a:solidFill>
+            <a:srgbClr val="0B5E54"/>
+          </a:solidFill>
+          <a:ln>
+            <a:noFill/>
+          </a:ln>
+          <a:effectLst/>
+        </p:spPr>
+        <p:style>
+          <a:lnRef idx="1">
+            <a:schemeClr val="accent1"/>
+          </a:lnRef>
+          <a:fillRef idx="3">
+            <a:schemeClr val="accent1"/>
+          </a:fillRef>
+          <a:effectRef idx="2">
+            <a:schemeClr val="accent1"/>
+          </a:effectRef>
+          <a:fontRef idx="minor">
+            <a:schemeClr val="lt1"/>
+          </a:fontRef>
+        </p:style>
+        <p:txBody>
+          <a:bodyPr rtlCol="0" anchor="ctr"/>
+          <a:lstStyle/>
+          <a:p>
+            <a:pPr algn="ctr"/>
+          </a:p>
+        </p:txBody>
+      </p:sp>
+      <p:sp>
+        <p:nvSpPr>
+          <p:cNvPr id="33" name="TextBox 32"/>
+          <p:cNvSpPr txBox="1"/>
+          <p:nvPr/>
+        </p:nvSpPr>
+        <p:spPr>
+          <a:xfrm>
+            <a:off x="11131803" y="3607308"/>
+            <a:ext cx="453644" cy="237744"/>
+          </a:xfrm>
+          <a:prstGeom prst="rect">
+            <a:avLst/>
+          </a:prstGeom>
+          <a:noFill/>
+        </p:spPr>
+        <p:txBody>
+          <a:bodyPr wrap="square" anchor="ctr" lIns="0" rIns="0" tIns="0" bIns="0">
+            <a:spAutoFit/>
+          </a:bodyPr>
+          <a:lstStyle/>
+          <a:p>
+            <a:pPr algn="ctr">
+              <a:lnSpc>
+                <a:spcPct val="114000"/>
+              </a:lnSpc>
+            </a:pPr>
+            <a:r>
+              <a:rPr sz="850" b="1">
+                <a:solidFill>
+                  <a:srgbClr val="FFFFFF"/>
+                </a:solidFill>
+              </a:rPr>
+              <a:t>达标</a:t>
+            </a:r>
+          </a:p>
+        </p:txBody>
+      </p:sp>
+      <p:sp>
+        <p:nvSpPr>
+          <p:cNvPr id="34" name="TextBox 33"/>
+          <p:cNvSpPr txBox="1"/>
+          <p:nvPr/>
+        </p:nvSpPr>
+        <p:spPr>
+          <a:xfrm>
+            <a:off x="932688" y="3863339"/>
+            <a:ext cx="10671047" cy="514350"/>
+          </a:xfrm>
+          <a:prstGeom prst="rect">
+            <a:avLst/>
+          </a:prstGeom>
+          <a:noFill/>
+        </p:spPr>
+        <p:txBody>
+          <a:bodyPr wrap="square" anchor="t" lIns="0" rIns="0" tIns="0" bIns="0">
+            <a:spAutoFit/>
+          </a:bodyPr>
+          <a:lstStyle/>
+          <a:p>
+            <a:pPr algn="l">
+              <a:lnSpc>
+                <a:spcPct val="114000"/>
+              </a:lnSpc>
+            </a:pPr>
+            <a:r>
+              <a:rPr sz="950" b="0">
+                <a:solidFill>
+                  <a:srgbClr val="1B2B28"/>
+                </a:solidFill>
+              </a:rPr>
+              <a:t>取重连最多的零丢弃链路（最保守）采集率 100.00% ≥ 99.50%｜平均延迟 22.28ms/条 &lt; 100.00ms｜AST 扫描 core.py 模块级可变全局 0 个（无跨线程共享的可变对象）</a:t>
+            </a:r>
+          </a:p>
+        </p:txBody>
+      </p:sp>
+      <p:sp>
+        <p:nvSpPr>
+          <p:cNvPr id="35" name="Rounded Rectangle 34"/>
+          <p:cNvSpPr/>
+          <p:nvPr/>
+        </p:nvSpPr>
+        <p:spPr>
+          <a:xfrm>
+            <a:off x="475488" y="4496562"/>
+            <a:ext cx="11237976" cy="916686"/>
+          </a:xfrm>
+          <a:prstGeom prst="roundRect">
+            <a:avLst>
+              <a:gd name="adj" fmla="val 6000"/>
+            </a:avLst>
+          </a:prstGeom>
+          <a:solidFill>
+            <a:srgbClr val="FFFFFF"/>
+          </a:solidFill>
+          <a:ln w="9525">
+            <a:solidFill>
+              <a:srgbClr val="E4F1EE"/>
+            </a:solidFill>
+          </a:ln>
+          <a:effectLst/>
+        </p:spPr>
+        <p:style>
+          <a:lnRef idx="1">
+            <a:schemeClr val="accent1"/>
+          </a:lnRef>
+          <a:fillRef idx="3">
+            <a:schemeClr val="accent1"/>
+          </a:fillRef>
+          <a:effectRef idx="2">
+            <a:schemeClr val="accent1"/>
+          </a:effectRef>
+          <a:fontRef idx="minor">
+            <a:schemeClr val="lt1"/>
+          </a:fontRef>
+        </p:style>
+        <p:txBody>
+          <a:bodyPr rtlCol="0" anchor="ctr"/>
+          <a:lstStyle/>
+          <a:p>
+            <a:pPr algn="ctr"/>
+          </a:p>
+        </p:txBody>
+      </p:sp>
+      <p:sp>
+        <p:nvSpPr>
+          <p:cNvPr id="36" name="Rounded Rectangle 35"/>
+          <p:cNvSpPr/>
+          <p:nvPr/>
+        </p:nvSpPr>
+        <p:spPr>
+          <a:xfrm>
+            <a:off x="475488" y="4496562"/>
+            <a:ext cx="54864" cy="916686"/>
+          </a:xfrm>
+          <a:prstGeom prst="roundRect">
+            <a:avLst>
+              <a:gd name="adj" fmla="val 50000"/>
+            </a:avLst>
+          </a:prstGeom>
+          <a:solidFill>
+            <a:srgbClr val="C9A227"/>
+          </a:solidFill>
+          <a:ln>
+            <a:noFill/>
+          </a:ln>
+          <a:effectLst/>
+        </p:spPr>
+        <p:style>
+          <a:lnRef idx="1">
+            <a:schemeClr val="accent1"/>
+          </a:lnRef>
+          <a:fillRef idx="3">
+            <a:schemeClr val="accent1"/>
+          </a:fillRef>
+          <a:effectRef idx="2">
+            <a:schemeClr val="accent1"/>
+          </a:effectRef>
+          <a:fontRef idx="minor">
+            <a:schemeClr val="lt1"/>
+          </a:fontRef>
+        </p:style>
+        <p:txBody>
+          <a:bodyPr rtlCol="0" anchor="ctr"/>
+          <a:lstStyle/>
+          <a:p>
+            <a:pPr algn="ctr"/>
+          </a:p>
+        </p:txBody>
+      </p:sp>
+      <p:sp>
+        <p:nvSpPr>
+          <p:cNvPr id="37" name="Rounded Rectangle 36"/>
+          <p:cNvSpPr/>
+          <p:nvPr/>
+        </p:nvSpPr>
+        <p:spPr>
+          <a:xfrm>
+            <a:off x="621792" y="4578857"/>
+            <a:ext cx="237744" cy="237744"/>
+          </a:xfrm>
+          <a:prstGeom prst="roundRect">
+            <a:avLst>
+              <a:gd name="adj" fmla="val 28000"/>
+            </a:avLst>
+          </a:prstGeom>
+          <a:solidFill>
+            <a:srgbClr val="C9A227"/>
+          </a:solidFill>
+          <a:ln>
+            <a:noFill/>
+          </a:ln>
+          <a:effectLst/>
+        </p:spPr>
+        <p:style>
+          <a:lnRef idx="1">
+            <a:schemeClr val="accent1"/>
+          </a:lnRef>
+          <a:fillRef idx="3">
+            <a:schemeClr val="accent1"/>
+          </a:fillRef>
+          <a:effectRef idx="2">
+            <a:schemeClr val="accent1"/>
+          </a:effectRef>
+          <a:fontRef idx="minor">
+            <a:schemeClr val="lt1"/>
+          </a:fontRef>
+        </p:style>
+        <p:txBody>
+          <a:bodyPr rtlCol="0" anchor="ctr"/>
+          <a:lstStyle/>
+          <a:p>
+            <a:pPr algn="ctr"/>
+          </a:p>
+        </p:txBody>
+      </p:sp>
+      <p:sp>
+        <p:nvSpPr>
+          <p:cNvPr id="38" name="TextBox 37"/>
+          <p:cNvSpPr txBox="1"/>
+          <p:nvPr/>
+        </p:nvSpPr>
+        <p:spPr>
+          <a:xfrm>
+            <a:off x="621792" y="4578857"/>
+            <a:ext cx="237744" cy="237744"/>
+          </a:xfrm>
+          <a:prstGeom prst="rect">
+            <a:avLst/>
+          </a:prstGeom>
+          <a:noFill/>
+        </p:spPr>
+        <p:txBody>
+          <a:bodyPr wrap="square" anchor="ctr" lIns="0" rIns="0" tIns="0" bIns="0">
+            <a:spAutoFit/>
+          </a:bodyPr>
+          <a:lstStyle/>
+          <a:p>
+            <a:pPr algn="ctr">
+              <a:lnSpc>
+                <a:spcPct val="114000"/>
+              </a:lnSpc>
+            </a:pPr>
+            <a:r>
+              <a:rPr sz="1000" b="1">
+                <a:solidFill>
+                  <a:srgbClr val="FFFFFF"/>
+                </a:solidFill>
+              </a:rPr>
+              <a:t>A</a:t>
+            </a:r>
+          </a:p>
+        </p:txBody>
+      </p:sp>
+      <p:sp>
+        <p:nvSpPr>
+          <p:cNvPr id="39" name="TextBox 38"/>
+          <p:cNvSpPr txBox="1"/>
+          <p:nvPr/>
+        </p:nvSpPr>
+        <p:spPr>
+          <a:xfrm>
+            <a:off x="932688" y="4560570"/>
+            <a:ext cx="8778240" cy="274320"/>
+          </a:xfrm>
+          <a:prstGeom prst="rect">
+            <a:avLst/>
+          </a:prstGeom>
+          <a:noFill/>
+        </p:spPr>
+        <p:txBody>
+          <a:bodyPr wrap="square" anchor="ctr" lIns="0" rIns="0" tIns="0" bIns="0">
+            <a:spAutoFit/>
+          </a:bodyPr>
+          <a:lstStyle/>
+          <a:p>
+            <a:pPr algn="l">
+              <a:lnSpc>
+                <a:spcPct val="114000"/>
+              </a:lnSpc>
+            </a:pPr>
+            <a:r>
+              <a:rPr sz="1050" b="1">
+                <a:solidFill>
+                  <a:srgbClr val="1B2B28"/>
+                </a:solidFill>
+              </a:rPr>
+              <a:t>超优</a:t>
+            </a:r>
+            <a:r>
+              <a:rPr sz="850" b="0">
+                <a:solidFill>
+                  <a:srgbClr val="5C6E6A"/>
+                </a:solidFill>
+              </a:rPr>
+              <a:t>   验收口径：</a:t>
+            </a:r>
+            <a:r>
+              <a:rPr sz="850" b="0">
+                <a:solidFill>
+                  <a:srgbClr val="5C6E6A"/>
+                </a:solidFill>
+              </a:rPr>
+              <a:t>优秀+故障自动转移/主从切换或性能监控小面板</a:t>
+            </a:r>
+          </a:p>
+        </p:txBody>
+      </p:sp>
+      <p:sp>
+        <p:nvSpPr>
+          <p:cNvPr id="40" name="Rounded Rectangle 39"/>
+          <p:cNvSpPr/>
+          <p:nvPr/>
+        </p:nvSpPr>
+        <p:spPr>
+          <a:xfrm>
+            <a:off x="11131803" y="4588001"/>
+            <a:ext cx="453644" cy="237744"/>
+          </a:xfrm>
+          <a:prstGeom prst="roundRect">
+            <a:avLst>
+              <a:gd name="adj" fmla="val 50000"/>
+            </a:avLst>
+          </a:prstGeom>
+          <a:solidFill>
+            <a:srgbClr val="0B5E54"/>
+          </a:solidFill>
+          <a:ln>
+            <a:noFill/>
+          </a:ln>
+          <a:effectLst/>
+        </p:spPr>
+        <p:style>
+          <a:lnRef idx="1">
+            <a:schemeClr val="accent1"/>
+          </a:lnRef>
+          <a:fillRef idx="3">
+            <a:schemeClr val="accent1"/>
+          </a:fillRef>
+          <a:effectRef idx="2">
+            <a:schemeClr val="accent1"/>
+          </a:effectRef>
+          <a:fontRef idx="minor">
+            <a:schemeClr val="lt1"/>
+          </a:fontRef>
+        </p:style>
+        <p:txBody>
+          <a:bodyPr rtlCol="0" anchor="ctr"/>
+          <a:lstStyle/>
+          <a:p>
+            <a:pPr algn="ctr"/>
+          </a:p>
+        </p:txBody>
+      </p:sp>
+      <p:sp>
+        <p:nvSpPr>
+          <p:cNvPr id="41" name="TextBox 40"/>
+          <p:cNvSpPr txBox="1"/>
+          <p:nvPr/>
+        </p:nvSpPr>
+        <p:spPr>
+          <a:xfrm>
+            <a:off x="11131803" y="4588001"/>
+            <a:ext cx="453644" cy="237744"/>
+          </a:xfrm>
+          <a:prstGeom prst="rect">
+            <a:avLst/>
+          </a:prstGeom>
+          <a:noFill/>
+        </p:spPr>
+        <p:txBody>
+          <a:bodyPr wrap="square" anchor="ctr" lIns="0" rIns="0" tIns="0" bIns="0">
+            <a:spAutoFit/>
+          </a:bodyPr>
+          <a:lstStyle/>
+          <a:p>
+            <a:pPr algn="ctr">
+              <a:lnSpc>
+                <a:spcPct val="114000"/>
+              </a:lnSpc>
+            </a:pPr>
+            <a:r>
+              <a:rPr sz="850" b="1">
+                <a:solidFill>
+                  <a:srgbClr val="FFFFFF"/>
+                </a:solidFill>
+              </a:rPr>
+              <a:t>达标</a:t>
+            </a:r>
+          </a:p>
+        </p:txBody>
+      </p:sp>
+      <p:sp>
+        <p:nvSpPr>
+          <p:cNvPr id="42" name="TextBox 41"/>
+          <p:cNvSpPr txBox="1"/>
+          <p:nvPr/>
+        </p:nvSpPr>
+        <p:spPr>
+          <a:xfrm>
+            <a:off x="932688" y="4844033"/>
+            <a:ext cx="10671047" cy="514350"/>
+          </a:xfrm>
+          <a:prstGeom prst="rect">
+            <a:avLst/>
+          </a:prstGeom>
+          <a:noFill/>
+        </p:spPr>
+        <p:txBody>
+          <a:bodyPr wrap="square" anchor="t" lIns="0" rIns="0" tIns="0" bIns="0">
+            <a:spAutoFit/>
+          </a:bodyPr>
+          <a:lstStyle/>
+          <a:p>
+            <a:pPr algn="l">
+              <a:lnSpc>
+                <a:spcPct val="114000"/>
+              </a:lnSpc>
+            </a:pPr>
+            <a:r>
+              <a:rPr sz="950" b="0">
+                <a:solidFill>
+                  <a:srgbClr val="1B2B28"/>
+                </a:solidFill>
+              </a:rPr>
+              <a:t>三链路对照即监控面板（不重连 / 重连默认 3 次 / 零丢弃 4 次），每条链路的计划-成功-丢弃-重试-调用-延迟六个计数各自自洽 通过</a:t>
+            </a:r>
+          </a:p>
+        </p:txBody>
+      </p:sp>
+      <p:sp>
+        <p:nvSpPr>
+          <p:cNvPr id="43" name="Rounded Rectangle 42"/>
+          <p:cNvSpPr/>
+          <p:nvPr/>
+        </p:nvSpPr>
+        <p:spPr>
+          <a:xfrm>
+            <a:off x="475488" y="5477255"/>
+            <a:ext cx="11237976" cy="941832"/>
+          </a:xfrm>
+          <a:prstGeom prst="roundRect">
+            <a:avLst>
+              <a:gd name="adj" fmla="val 5000"/>
+            </a:avLst>
+          </a:prstGeom>
+          <a:solidFill>
+            <a:srgbClr val="E4F1EE"/>
+          </a:solidFill>
+          <a:ln>
+            <a:noFill/>
+          </a:ln>
+          <a:effectLst/>
+        </p:spPr>
+        <p:style>
+          <a:lnRef idx="1">
+            <a:schemeClr val="accent1"/>
+          </a:lnRef>
+          <a:fillRef idx="3">
+            <a:schemeClr val="accent1"/>
+          </a:fillRef>
+          <a:effectRef idx="2">
+            <a:schemeClr val="accent1"/>
+          </a:effectRef>
+          <a:fontRef idx="minor">
+            <a:schemeClr val="lt1"/>
+          </a:fontRef>
+        </p:style>
+        <p:txBody>
+          <a:bodyPr rtlCol="0" anchor="ctr"/>
+          <a:lstStyle/>
+          <a:p>
+            <a:pPr algn="ctr"/>
+          </a:p>
+        </p:txBody>
+      </p:sp>
+      <p:sp>
+        <p:nvSpPr>
+          <p:cNvPr id="44" name="Rounded Rectangle 43"/>
+          <p:cNvSpPr/>
+          <p:nvPr/>
+        </p:nvSpPr>
+        <p:spPr>
+          <a:xfrm>
+            <a:off x="475488" y="5477255"/>
+            <a:ext cx="54864" cy="941832"/>
+          </a:xfrm>
+          <a:prstGeom prst="roundRect">
+            <a:avLst>
+              <a:gd name="adj" fmla="val 50000"/>
+            </a:avLst>
+          </a:prstGeom>
+          <a:solidFill>
+            <a:srgbClr val="C9A227"/>
+          </a:solidFill>
+          <a:ln>
+            <a:noFill/>
+          </a:ln>
+          <a:effectLst/>
+        </p:spPr>
+        <p:style>
+          <a:lnRef idx="1">
+            <a:schemeClr val="accent1"/>
+          </a:lnRef>
+          <a:fillRef idx="3">
+            <a:schemeClr val="accent1"/>
+          </a:fillRef>
+          <a:effectRef idx="2">
+            <a:schemeClr val="accent1"/>
+          </a:effectRef>
+          <a:fontRef idx="minor">
+            <a:schemeClr val="lt1"/>
+          </a:fontRef>
+        </p:style>
+        <p:txBody>
+          <a:bodyPr rtlCol="0" anchor="ctr"/>
+          <a:lstStyle/>
+          <a:p>
+            <a:pPr algn="ctr"/>
+          </a:p>
+        </p:txBody>
+      </p:sp>
+      <p:sp>
+        <p:nvSpPr>
+          <p:cNvPr id="45" name="TextBox 44"/>
+          <p:cNvSpPr txBox="1"/>
+          <p:nvPr/>
+        </p:nvSpPr>
+        <p:spPr>
+          <a:xfrm>
+            <a:off x="676656" y="5550407"/>
+            <a:ext cx="10908792" cy="795528"/>
+          </a:xfrm>
+          <a:prstGeom prst="rect">
+            <a:avLst/>
+          </a:prstGeom>
+          <a:noFill/>
+        </p:spPr>
+        <p:txBody>
+          <a:bodyPr wrap="square" anchor="t" lIns="0" rIns="0" tIns="0" bIns="0">
+            <a:spAutoFit/>
+          </a:bodyPr>
+          <a:lstStyle/>
+          <a:p>
+            <a:pPr algn="l">
+              <a:lnSpc>
+                <a:spcPct val="124000"/>
+              </a:lnSpc>
+            </a:pPr>
+            <a:r>
+              <a:rPr sz="850" b="0">
+                <a:solidFill>
+                  <a:srgbClr val="1B2B28"/>
+                </a:solidFill>
+              </a:rPr>
+              <a:t>出处：工程化项目/p41_collector_hub/output/report.txt 第 36 节「工单验收四档对照」——本机 2026-10-28 05:08 实跑落盘，上表数字逐字摘录、未改写。</a:t>
+            </a:r>
+          </a:p>
+          <a:p>
+            <a:pPr algn="l">
+              <a:lnSpc>
+                <a:spcPct val="124000"/>
+              </a:lnSpc>
+            </a:pPr>
+            <a:r>
+              <a:rPr sz="850" b="0">
+                <a:solidFill>
+                  <a:srgbClr val="1B2B28"/>
+                </a:solidFill>
+              </a:rPr>
+              <a:t>复现：cd 工程化项目/p41_collector_hub &amp;&amp; python run.py &amp;&amp; python -m pytest -q -o addopts=''</a:t>
+            </a:r>
+          </a:p>
+          <a:p>
+            <a:pPr algn="l">
+              <a:lnSpc>
+                <a:spcPct val="124000"/>
+              </a:lnSpc>
+            </a:pPr>
+            <a:r>
+              <a:rPr sz="850" b="0">
+                <a:solidFill>
+                  <a:srgbClr val="1B2B28"/>
+                </a:solidFill>
+              </a:rPr>
+              <a:t>口径：表中「判定」沿用报告原词——绿=达标/通过，黄=仅本节取证项通过（未取证子项在报告里逐条点名），红=未达标。</a:t>
+            </a:r>
+          </a:p>
+        </p:txBody>
+      </p:sp>
+    </p:spTree>
+  </p:cSld>
+  <p:clrMapOvr>
+    <a:masterClrMapping/>
+  </p:clrMapOvr>
+</p:sld>
+</file>
+
+<file path=ppt/slides/slide61.xml><?xml version="1.0" encoding="utf-8"?>
+<p:sld xmlns:a="http://schemas.openxmlformats.org/drawingml/2006/main" xmlns:p="http://schemas.openxmlformats.org/presentationml/2006/main" xmlns:r="http://schemas.openxmlformats.org/officeDocument/2006/relationships">
+  <p:cSld>
+    <p:spTree>
+      <p:nvGrpSpPr>
+        <p:cNvPr id="1" name=""/>
+        <p:cNvGrpSpPr/>
+        <p:nvPr/>
+      </p:nvGrpSpPr>
+      <p:grpSpPr/>
+      <p:sp>
+        <p:nvSpPr>
+          <p:cNvPr id="2" name="Rounded Rectangle 1"/>
+          <p:cNvSpPr/>
+          <p:nvPr/>
+        </p:nvSpPr>
+        <p:spPr>
+          <a:xfrm>
+            <a:off x="0" y="0"/>
+            <a:ext cx="12191695" cy="64008"/>
+          </a:xfrm>
+          <a:prstGeom prst="roundRect">
+            <a:avLst>
+              <a:gd name="adj" fmla="val 50000"/>
+            </a:avLst>
+          </a:prstGeom>
+          <a:solidFill>
+            <a:srgbClr val="0B5E54"/>
+          </a:solidFill>
+          <a:ln>
+            <a:noFill/>
+          </a:ln>
+          <a:effectLst/>
+        </p:spPr>
+        <p:style>
+          <a:lnRef idx="1">
+            <a:schemeClr val="accent1"/>
+          </a:lnRef>
+          <a:fillRef idx="3">
+            <a:schemeClr val="accent1"/>
+          </a:fillRef>
+          <a:effectRef idx="2">
+            <a:schemeClr val="accent1"/>
+          </a:effectRef>
+          <a:fontRef idx="minor">
+            <a:schemeClr val="lt1"/>
+          </a:fontRef>
+        </p:style>
+        <p:txBody>
+          <a:bodyPr rtlCol="0" anchor="ctr"/>
+          <a:lstStyle/>
+          <a:p>
+            <a:pPr algn="ctr"/>
+          </a:p>
+        </p:txBody>
+      </p:sp>
+      <p:sp>
+        <p:nvSpPr>
+          <p:cNvPr id="3" name="TextBox 2"/>
+          <p:cNvSpPr txBox="1"/>
+          <p:nvPr/>
+        </p:nvSpPr>
+        <p:spPr>
+          <a:xfrm>
+            <a:off x="475488" y="146304"/>
+            <a:ext cx="8229600" cy="292608"/>
+          </a:xfrm>
+          <a:prstGeom prst="rect">
+            <a:avLst/>
+          </a:prstGeom>
+          <a:noFill/>
+        </p:spPr>
+        <p:txBody>
+          <a:bodyPr wrap="square" anchor="t" lIns="0" rIns="0" tIns="0" bIns="0">
+            <a:spAutoFit/>
+          </a:bodyPr>
+          <a:lstStyle/>
+          <a:p>
+            <a:pPr algn="l">
+              <a:lnSpc>
+                <a:spcPct val="114000"/>
+              </a:lnSpc>
+            </a:pPr>
+            <a:r>
+              <a:rPr sz="1100" b="1">
+                <a:solidFill>
+                  <a:srgbClr val="0B5E54"/>
+                </a:solidFill>
+              </a:rPr>
+              <a:t>工单实战 · 运行留证</a:t>
+            </a:r>
+          </a:p>
+        </p:txBody>
+      </p:sp>
+      <p:sp>
+        <p:nvSpPr>
+          <p:cNvPr id="4" name="Rounded Rectangle 3"/>
+          <p:cNvSpPr/>
+          <p:nvPr/>
+        </p:nvSpPr>
+        <p:spPr>
+          <a:xfrm>
+            <a:off x="475488" y="475488"/>
+            <a:ext cx="2027872" cy="310896"/>
+          </a:xfrm>
+          <a:prstGeom prst="roundRect">
+            <a:avLst>
+              <a:gd name="adj" fmla="val 50000"/>
+            </a:avLst>
+          </a:prstGeom>
+          <a:solidFill>
+            <a:srgbClr val="C9A227"/>
+          </a:solidFill>
+          <a:ln>
+            <a:noFill/>
+          </a:ln>
+          <a:effectLst/>
+        </p:spPr>
+        <p:style>
+          <a:lnRef idx="1">
+            <a:schemeClr val="accent1"/>
+          </a:lnRef>
+          <a:fillRef idx="3">
+            <a:schemeClr val="accent1"/>
+          </a:fillRef>
+          <a:effectRef idx="2">
+            <a:schemeClr val="accent1"/>
+          </a:effectRef>
+          <a:fontRef idx="minor">
+            <a:schemeClr val="lt1"/>
+          </a:fontRef>
+        </p:style>
+        <p:txBody>
+          <a:bodyPr rtlCol="0" anchor="ctr"/>
+          <a:lstStyle/>
+          <a:p>
+            <a:pPr algn="ctr"/>
+          </a:p>
+        </p:txBody>
+      </p:sp>
+      <p:sp>
+        <p:nvSpPr>
+          <p:cNvPr id="5" name="TextBox 4"/>
+          <p:cNvSpPr txBox="1"/>
+          <p:nvPr/>
+        </p:nvSpPr>
+        <p:spPr>
+          <a:xfrm>
+            <a:off x="475488" y="475488"/>
+            <a:ext cx="2027872" cy="310896"/>
+          </a:xfrm>
+          <a:prstGeom prst="rect">
+            <a:avLst/>
+          </a:prstGeom>
+          <a:noFill/>
+        </p:spPr>
+        <p:txBody>
+          <a:bodyPr wrap="square" anchor="ctr" lIns="0" rIns="0" tIns="0" bIns="0">
+            <a:spAutoFit/>
+          </a:bodyPr>
+          <a:lstStyle/>
+          <a:p>
+            <a:pPr algn="ctr">
+              <a:lnSpc>
+                <a:spcPct val="114000"/>
+              </a:lnSpc>
+            </a:pPr>
+            <a:r>
+              <a:rPr sz="1050" b="1">
+                <a:solidFill>
+                  <a:srgbClr val="FFFFFF"/>
+                </a:solidFill>
+              </a:rPr>
+              <a:t>SCREENSHOT · 终端逐字截图</a:t>
+            </a:r>
+          </a:p>
+        </p:txBody>
+      </p:sp>
+      <p:sp>
+        <p:nvSpPr>
+          <p:cNvPr id="6" name="TextBox 5"/>
+          <p:cNvSpPr txBox="1"/>
+          <p:nvPr/>
+        </p:nvSpPr>
+        <p:spPr>
+          <a:xfrm>
+            <a:off x="475488" y="859536"/>
+            <a:ext cx="11237976" cy="502920"/>
+          </a:xfrm>
+          <a:prstGeom prst="rect">
+            <a:avLst/>
+          </a:prstGeom>
+          <a:noFill/>
+        </p:spPr>
+        <p:txBody>
+          <a:bodyPr wrap="square" anchor="t" lIns="0" rIns="0" tIns="0" bIns="0">
+            <a:spAutoFit/>
+          </a:bodyPr>
+          <a:lstStyle/>
+          <a:p>
+            <a:pPr algn="l">
+              <a:lnSpc>
+                <a:spcPct val="114000"/>
+              </a:lnSpc>
+            </a:pPr>
+            <a:r>
+              <a:rPr sz="2200" b="1">
+                <a:solidFill>
+                  <a:srgbClr val="1B2B28"/>
+                </a:solidFill>
+              </a:rPr>
+              <a:t>P4.1 工单验收四档对照 · 四档逐字输出截图</a:t>
+            </a:r>
+          </a:p>
+        </p:txBody>
+      </p:sp>
+      <p:sp>
+        <p:nvSpPr>
+          <p:cNvPr id="7" name="Rounded Rectangle 6"/>
+          <p:cNvSpPr/>
+          <p:nvPr/>
+        </p:nvSpPr>
+        <p:spPr>
+          <a:xfrm>
+            <a:off x="475488" y="1389888"/>
+            <a:ext cx="1234440" cy="27432"/>
+          </a:xfrm>
+          <a:prstGeom prst="roundRect">
+            <a:avLst>
+              <a:gd name="adj" fmla="val 50000"/>
+            </a:avLst>
+          </a:prstGeom>
+          <a:solidFill>
+            <a:srgbClr val="C9A227"/>
+          </a:solidFill>
+          <a:ln>
+            <a:noFill/>
+          </a:ln>
+          <a:effectLst/>
+        </p:spPr>
+        <p:style>
+          <a:lnRef idx="1">
+            <a:schemeClr val="accent1"/>
+          </a:lnRef>
+          <a:fillRef idx="3">
+            <a:schemeClr val="accent1"/>
+          </a:fillRef>
+          <a:effectRef idx="2">
+            <a:schemeClr val="accent1"/>
+          </a:effectRef>
+          <a:fontRef idx="minor">
+            <a:schemeClr val="lt1"/>
+          </a:fontRef>
+        </p:style>
+        <p:txBody>
+          <a:bodyPr rtlCol="0" anchor="ctr"/>
+          <a:lstStyle/>
+          <a:p>
+            <a:pPr algn="ctr"/>
+          </a:p>
+        </p:txBody>
+      </p:sp>
+      <p:sp>
+        <p:nvSpPr>
+          <p:cNvPr id="8" name="Rounded Rectangle 7"/>
+          <p:cNvSpPr/>
+          <p:nvPr/>
+        </p:nvSpPr>
+        <p:spPr>
+          <a:xfrm>
+            <a:off x="475488" y="6419088"/>
+            <a:ext cx="11237976" cy="10972"/>
+          </a:xfrm>
+          <a:prstGeom prst="roundRect">
+            <a:avLst>
+              <a:gd name="adj" fmla="val 50000"/>
+            </a:avLst>
+          </a:prstGeom>
+          <a:solidFill>
+            <a:srgbClr val="E4F1EE"/>
+          </a:solidFill>
+          <a:ln>
+            <a:noFill/>
+          </a:ln>
+          <a:effectLst/>
+        </p:spPr>
+        <p:style>
+          <a:lnRef idx="1">
+            <a:schemeClr val="accent1"/>
+          </a:lnRef>
+          <a:fillRef idx="3">
+            <a:schemeClr val="accent1"/>
+          </a:fillRef>
+          <a:effectRef idx="2">
+            <a:schemeClr val="accent1"/>
+          </a:effectRef>
+          <a:fontRef idx="minor">
+            <a:schemeClr val="lt1"/>
+          </a:fontRef>
+        </p:style>
+        <p:txBody>
+          <a:bodyPr rtlCol="0" anchor="ctr"/>
+          <a:lstStyle/>
+          <a:p>
+            <a:pPr algn="ctr"/>
+          </a:p>
+        </p:txBody>
+      </p:sp>
+      <p:sp>
+        <p:nvSpPr>
+          <p:cNvPr id="9" name="TextBox 8"/>
+          <p:cNvSpPr txBox="1"/>
+          <p:nvPr/>
+        </p:nvSpPr>
+        <p:spPr>
+          <a:xfrm>
+            <a:off x="475488" y="6455664"/>
+            <a:ext cx="7315200" cy="292608"/>
+          </a:xfrm>
+          <a:prstGeom prst="rect">
+            <a:avLst/>
+          </a:prstGeom>
+          <a:noFill/>
+        </p:spPr>
+        <p:txBody>
+          <a:bodyPr wrap="square" anchor="t" lIns="0" rIns="0" tIns="0" bIns="0">
+            <a:spAutoFit/>
+          </a:bodyPr>
+          <a:lstStyle/>
+          <a:p>
+            <a:pPr algn="l">
+              <a:lnSpc>
+                <a:spcPct val="114000"/>
+              </a:lnSpc>
+            </a:pPr>
+            <a:r>
+              <a:rPr sz="900" b="0">
+                <a:solidFill>
+                  <a:srgbClr val="5C6E6A"/>
+                </a:solidFill>
+              </a:rPr>
+              <a:t>两江智造集团 · Python程序设计（项目实战）</a:t>
+            </a:r>
+          </a:p>
+        </p:txBody>
+      </p:sp>
+      <p:sp>
+        <p:nvSpPr>
+          <p:cNvPr id="10" name="TextBox 9"/>
+          <p:cNvSpPr txBox="1"/>
+          <p:nvPr/>
+        </p:nvSpPr>
+        <p:spPr>
+          <a:xfrm>
+            <a:off x="10597896" y="6537960"/>
+            <a:ext cx="996696" cy="301752"/>
+          </a:xfrm>
+          <a:prstGeom prst="rect">
+            <a:avLst/>
+          </a:prstGeom>
+          <a:noFill/>
+        </p:spPr>
+        <p:txBody>
+          <a:bodyPr wrap="square" anchor="t" lIns="0" rIns="0" tIns="0" bIns="0">
+            <a:spAutoFit/>
+          </a:bodyPr>
+          <a:lstStyle/>
+          <a:p>
+            <a:pPr algn="r">
+              <a:lnSpc>
+                <a:spcPct val="114000"/>
+              </a:lnSpc>
+            </a:pPr>
+            <a:r>
+              <a:rPr sz="1000" b="0">
+                <a:solidFill>
+                  <a:srgbClr val="8A97B5"/>
+                </a:solidFill>
+              </a:rPr>
+              <a:t>46 / 62</a:t>
+            </a:r>
+          </a:p>
+        </p:txBody>
+      </p:sp>
+      <p:sp>
+        <p:nvSpPr>
+          <p:cNvPr id="11" name="TextBox 10"/>
+          <p:cNvSpPr txBox="1"/>
+          <p:nvPr/>
+        </p:nvSpPr>
+        <p:spPr>
+          <a:xfrm>
+            <a:off x="475488" y="1517904"/>
+            <a:ext cx="11237976" cy="237744"/>
+          </a:xfrm>
+          <a:prstGeom prst="rect">
+            <a:avLst/>
+          </a:prstGeom>
+          <a:noFill/>
+        </p:spPr>
+        <p:txBody>
+          <a:bodyPr wrap="square" anchor="t" lIns="0" rIns="0" tIns="0" bIns="0">
+            <a:spAutoFit/>
+          </a:bodyPr>
+          <a:lstStyle/>
+          <a:p>
+            <a:pPr algn="l">
+              <a:lnSpc>
+                <a:spcPct val="114000"/>
+              </a:lnSpc>
+            </a:pPr>
+            <a:r>
+              <a:rPr sz="1000" b="0">
+                <a:solidFill>
+                  <a:srgbClr val="5C6E6A"/>
+                </a:solidFill>
+              </a:rPr>
+              <a:t>终端窗口截图：由 report.txt 本节逐字渲染，未手工改写</a:t>
+            </a:r>
+          </a:p>
+        </p:txBody>
+      </p:sp>
+      <p:pic>
+        <p:nvPicPr>
+          <p:cNvPr id="12" name="Picture 11" descr="p41_collector_hub_workorder.png"/>
+          <p:cNvPicPr>
+            <a:picLocks noChangeAspect="1"/>
+          </p:cNvPicPr>
+          <p:nvPr/>
+        </p:nvPicPr>
+        <p:blipFill>
+          <a:blip r:embed="rId2"/>
+          <a:stretch>
+            <a:fillRect/>
+          </a:stretch>
+        </p:blipFill>
+        <p:spPr>
+          <a:xfrm>
+            <a:off x="475488" y="2048196"/>
+            <a:ext cx="11237976" cy="3337679"/>
+          </a:xfrm>
+          <a:prstGeom prst="rect">
+            <a:avLst/>
+          </a:prstGeom>
+        </p:spPr>
+      </p:pic>
+      <p:sp>
+        <p:nvSpPr>
+          <p:cNvPr id="13" name="TextBox 12"/>
+          <p:cNvSpPr txBox="1"/>
+          <p:nvPr/>
+        </p:nvSpPr>
+        <p:spPr>
+          <a:xfrm>
+            <a:off x="475488" y="5422451"/>
+            <a:ext cx="11237976" cy="256032"/>
+          </a:xfrm>
+          <a:prstGeom prst="rect">
+            <a:avLst/>
+          </a:prstGeom>
+          <a:noFill/>
+        </p:spPr>
+        <p:txBody>
+          <a:bodyPr wrap="square" anchor="t" lIns="0" rIns="0" tIns="0" bIns="0">
+            <a:spAutoFit/>
+          </a:bodyPr>
+          <a:lstStyle/>
+          <a:p>
+            <a:pPr algn="l">
+              <a:lnSpc>
+                <a:spcPct val="114000"/>
+              </a:lnSpc>
+            </a:pPr>
+            <a:r>
+              <a:rPr sz="850" b="0">
+                <a:solidFill>
+                  <a:srgbClr val="5C6E6A"/>
+                </a:solidFill>
+              </a:rPr>
+              <a:t>▲ p41_collector_hub：工单验收四档对照 第 36 行起的四档逐字原文（绿=达标/通过，黄=仅本节取证项，橙=未实测项）</a:t>
+            </a:r>
+          </a:p>
+        </p:txBody>
+      </p:sp>
+    </p:spTree>
+  </p:cSld>
+  <p:clrMapOvr>
+    <a:masterClrMapping/>
+  </p:clrMapOvr>
+</p:sld>
+</file>
+
+<file path=ppt/slides/slide62.xml><?xml version="1.0" encoding="utf-8"?>
+<p:sld xmlns:a="http://schemas.openxmlformats.org/drawingml/2006/main" xmlns:p="http://schemas.openxmlformats.org/presentationml/2006/main" xmlns:r="http://schemas.openxmlformats.org/officeDocument/2006/relationships">
+  <p:cSld>
+    <p:spTree>
+      <p:nvGrpSpPr>
+        <p:cNvPr id="1" name=""/>
+        <p:cNvGrpSpPr/>
+        <p:nvPr/>
+      </p:nvGrpSpPr>
+      <p:grpSpPr/>
+      <p:sp>
+        <p:nvSpPr>
+          <p:cNvPr id="2" name="Rounded Rectangle 1"/>
+          <p:cNvSpPr/>
+          <p:nvPr/>
+        </p:nvSpPr>
+        <p:spPr>
+          <a:xfrm>
+            <a:off x="0" y="0"/>
+            <a:ext cx="12191695" cy="64008"/>
+          </a:xfrm>
+          <a:prstGeom prst="roundRect">
+            <a:avLst>
+              <a:gd name="adj" fmla="val 50000"/>
+            </a:avLst>
+          </a:prstGeom>
+          <a:solidFill>
+            <a:srgbClr val="0B5E54"/>
+          </a:solidFill>
+          <a:ln>
+            <a:noFill/>
+          </a:ln>
+          <a:effectLst/>
+        </p:spPr>
+        <p:style>
+          <a:lnRef idx="1">
+            <a:schemeClr val="accent1"/>
+          </a:lnRef>
+          <a:fillRef idx="3">
+            <a:schemeClr val="accent1"/>
+          </a:fillRef>
+          <a:effectRef idx="2">
+            <a:schemeClr val="accent1"/>
+          </a:effectRef>
+          <a:fontRef idx="minor">
+            <a:schemeClr val="lt1"/>
+          </a:fontRef>
+        </p:style>
+        <p:txBody>
+          <a:bodyPr rtlCol="0" anchor="ctr"/>
+          <a:lstStyle/>
+          <a:p>
+            <a:pPr algn="ctr"/>
+          </a:p>
+        </p:txBody>
+      </p:sp>
+      <p:sp>
+        <p:nvSpPr>
+          <p:cNvPr id="3" name="TextBox 2"/>
+          <p:cNvSpPr txBox="1"/>
+          <p:nvPr/>
+        </p:nvSpPr>
+        <p:spPr>
+          <a:xfrm>
+            <a:off x="475488" y="146304"/>
+            <a:ext cx="8229600" cy="292608"/>
+          </a:xfrm>
+          <a:prstGeom prst="rect">
+            <a:avLst/>
+          </a:prstGeom>
+          <a:noFill/>
+        </p:spPr>
+        <p:txBody>
+          <a:bodyPr wrap="square" anchor="t" lIns="0" rIns="0" tIns="0" bIns="0">
+            <a:spAutoFit/>
+          </a:bodyPr>
+          <a:lstStyle/>
+          <a:p>
+            <a:pPr algn="l">
+              <a:lnSpc>
+                <a:spcPct val="114000"/>
+              </a:lnSpc>
+            </a:pPr>
+            <a:r>
+              <a:rPr sz="1100" b="1">
+                <a:solidFill>
+                  <a:srgbClr val="0B5E54"/>
+                </a:solidFill>
+              </a:rPr>
+              <a:t>工单实战 · 运行留证</a:t>
+            </a:r>
+          </a:p>
+        </p:txBody>
+      </p:sp>
+      <p:sp>
+        <p:nvSpPr>
+          <p:cNvPr id="4" name="Rounded Rectangle 3"/>
+          <p:cNvSpPr/>
+          <p:nvPr/>
+        </p:nvSpPr>
+        <p:spPr>
+          <a:xfrm>
+            <a:off x="475488" y="475488"/>
+            <a:ext cx="2027872" cy="310896"/>
+          </a:xfrm>
+          <a:prstGeom prst="roundRect">
+            <a:avLst>
+              <a:gd name="adj" fmla="val 50000"/>
+            </a:avLst>
+          </a:prstGeom>
+          <a:solidFill>
+            <a:srgbClr val="C9A227"/>
+          </a:solidFill>
+          <a:ln>
+            <a:noFill/>
+          </a:ln>
+          <a:effectLst/>
+        </p:spPr>
+        <p:style>
+          <a:lnRef idx="1">
+            <a:schemeClr val="accent1"/>
+          </a:lnRef>
+          <a:fillRef idx="3">
+            <a:schemeClr val="accent1"/>
+          </a:fillRef>
+          <a:effectRef idx="2">
+            <a:schemeClr val="accent1"/>
+          </a:effectRef>
+          <a:fontRef idx="minor">
+            <a:schemeClr val="lt1"/>
+          </a:fontRef>
+        </p:style>
+        <p:txBody>
+          <a:bodyPr rtlCol="0" anchor="ctr"/>
+          <a:lstStyle/>
+          <a:p>
+            <a:pPr algn="ctr"/>
+          </a:p>
+        </p:txBody>
+      </p:sp>
+      <p:sp>
+        <p:nvSpPr>
+          <p:cNvPr id="5" name="TextBox 4"/>
+          <p:cNvSpPr txBox="1"/>
+          <p:nvPr/>
+        </p:nvSpPr>
+        <p:spPr>
+          <a:xfrm>
+            <a:off x="475488" y="475488"/>
+            <a:ext cx="2027872" cy="310896"/>
+          </a:xfrm>
+          <a:prstGeom prst="rect">
+            <a:avLst/>
+          </a:prstGeom>
+          <a:noFill/>
+        </p:spPr>
+        <p:txBody>
+          <a:bodyPr wrap="square" anchor="ctr" lIns="0" rIns="0" tIns="0" bIns="0">
+            <a:spAutoFit/>
+          </a:bodyPr>
+          <a:lstStyle/>
+          <a:p>
+            <a:pPr algn="ctr">
+              <a:lnSpc>
+                <a:spcPct val="114000"/>
+              </a:lnSpc>
+            </a:pPr>
+            <a:r>
+              <a:rPr sz="1050" b="1">
+                <a:solidFill>
+                  <a:srgbClr val="FFFFFF"/>
+                </a:solidFill>
+              </a:rPr>
+              <a:t>SCREENSHOT · 终端逐字截图</a:t>
+            </a:r>
+          </a:p>
+        </p:txBody>
+      </p:sp>
+      <p:sp>
+        <p:nvSpPr>
+          <p:cNvPr id="6" name="TextBox 5"/>
+          <p:cNvSpPr txBox="1"/>
+          <p:nvPr/>
+        </p:nvSpPr>
+        <p:spPr>
+          <a:xfrm>
+            <a:off x="475488" y="859536"/>
+            <a:ext cx="11237976" cy="502920"/>
+          </a:xfrm>
+          <a:prstGeom prst="rect">
+            <a:avLst/>
+          </a:prstGeom>
+          <a:noFill/>
+        </p:spPr>
+        <p:txBody>
+          <a:bodyPr wrap="square" anchor="t" lIns="0" rIns="0" tIns="0" bIns="0">
+            <a:spAutoFit/>
+          </a:bodyPr>
+          <a:lstStyle/>
+          <a:p>
+            <a:pPr algn="l">
+              <a:lnSpc>
+                <a:spcPct val="114000"/>
+              </a:lnSpc>
+            </a:pPr>
+            <a:r>
+              <a:rPr sz="2200" b="1">
+                <a:solidFill>
+                  <a:srgbClr val="1B2B28"/>
+                </a:solidFill>
+              </a:rPr>
+              <a:t>P4.1 · 另一套阶梯逐字输出＋pytest 全量实跑</a:t>
+            </a:r>
+          </a:p>
+        </p:txBody>
+      </p:sp>
+      <p:sp>
+        <p:nvSpPr>
+          <p:cNvPr id="7" name="Rounded Rectangle 6"/>
+          <p:cNvSpPr/>
+          <p:nvPr/>
+        </p:nvSpPr>
+        <p:spPr>
+          <a:xfrm>
+            <a:off x="475488" y="1389888"/>
+            <a:ext cx="1234440" cy="27432"/>
+          </a:xfrm>
+          <a:prstGeom prst="roundRect">
+            <a:avLst>
+              <a:gd name="adj" fmla="val 50000"/>
+            </a:avLst>
+          </a:prstGeom>
+          <a:solidFill>
+            <a:srgbClr val="C9A227"/>
+          </a:solidFill>
+          <a:ln>
+            <a:noFill/>
+          </a:ln>
+          <a:effectLst/>
+        </p:spPr>
+        <p:style>
+          <a:lnRef idx="1">
+            <a:schemeClr val="accent1"/>
+          </a:lnRef>
+          <a:fillRef idx="3">
+            <a:schemeClr val="accent1"/>
+          </a:fillRef>
+          <a:effectRef idx="2">
+            <a:schemeClr val="accent1"/>
+          </a:effectRef>
+          <a:fontRef idx="minor">
+            <a:schemeClr val="lt1"/>
+          </a:fontRef>
+        </p:style>
+        <p:txBody>
+          <a:bodyPr rtlCol="0" anchor="ctr"/>
+          <a:lstStyle/>
+          <a:p>
+            <a:pPr algn="ctr"/>
+          </a:p>
+        </p:txBody>
+      </p:sp>
+      <p:sp>
+        <p:nvSpPr>
+          <p:cNvPr id="8" name="Rounded Rectangle 7"/>
+          <p:cNvSpPr/>
+          <p:nvPr/>
+        </p:nvSpPr>
+        <p:spPr>
+          <a:xfrm>
+            <a:off x="475488" y="6419088"/>
+            <a:ext cx="11237976" cy="10972"/>
+          </a:xfrm>
+          <a:prstGeom prst="roundRect">
+            <a:avLst>
+              <a:gd name="adj" fmla="val 50000"/>
+            </a:avLst>
+          </a:prstGeom>
+          <a:solidFill>
+            <a:srgbClr val="E4F1EE"/>
+          </a:solidFill>
+          <a:ln>
+            <a:noFill/>
+          </a:ln>
+          <a:effectLst/>
+        </p:spPr>
+        <p:style>
+          <a:lnRef idx="1">
+            <a:schemeClr val="accent1"/>
+          </a:lnRef>
+          <a:fillRef idx="3">
+            <a:schemeClr val="accent1"/>
+          </a:fillRef>
+          <a:effectRef idx="2">
+            <a:schemeClr val="accent1"/>
+          </a:effectRef>
+          <a:fontRef idx="minor">
+            <a:schemeClr val="lt1"/>
+          </a:fontRef>
+        </p:style>
+        <p:txBody>
+          <a:bodyPr rtlCol="0" anchor="ctr"/>
+          <a:lstStyle/>
+          <a:p>
+            <a:pPr algn="ctr"/>
+          </a:p>
+        </p:txBody>
+      </p:sp>
+      <p:sp>
+        <p:nvSpPr>
+          <p:cNvPr id="9" name="TextBox 8"/>
+          <p:cNvSpPr txBox="1"/>
+          <p:nvPr/>
+        </p:nvSpPr>
+        <p:spPr>
+          <a:xfrm>
+            <a:off x="475488" y="6455664"/>
+            <a:ext cx="7315200" cy="292608"/>
+          </a:xfrm>
+          <a:prstGeom prst="rect">
+            <a:avLst/>
+          </a:prstGeom>
+          <a:noFill/>
+        </p:spPr>
+        <p:txBody>
+          <a:bodyPr wrap="square" anchor="t" lIns="0" rIns="0" tIns="0" bIns="0">
+            <a:spAutoFit/>
+          </a:bodyPr>
+          <a:lstStyle/>
+          <a:p>
+            <a:pPr algn="l">
+              <a:lnSpc>
+                <a:spcPct val="114000"/>
+              </a:lnSpc>
+            </a:pPr>
+            <a:r>
+              <a:rPr sz="900" b="0">
+                <a:solidFill>
+                  <a:srgbClr val="5C6E6A"/>
+                </a:solidFill>
+              </a:rPr>
+              <a:t>两江智造集团 · Python程序设计（项目实战）</a:t>
+            </a:r>
+          </a:p>
+        </p:txBody>
+      </p:sp>
+      <p:sp>
+        <p:nvSpPr>
+          <p:cNvPr id="10" name="TextBox 9"/>
+          <p:cNvSpPr txBox="1"/>
+          <p:nvPr/>
+        </p:nvSpPr>
+        <p:spPr>
+          <a:xfrm>
+            <a:off x="10597896" y="6537960"/>
+            <a:ext cx="996696" cy="301752"/>
+          </a:xfrm>
+          <a:prstGeom prst="rect">
+            <a:avLst/>
+          </a:prstGeom>
+          <a:noFill/>
+        </p:spPr>
+        <p:txBody>
+          <a:bodyPr wrap="square" anchor="t" lIns="0" rIns="0" tIns="0" bIns="0">
+            <a:spAutoFit/>
+          </a:bodyPr>
+          <a:lstStyle/>
+          <a:p>
+            <a:pPr algn="r">
+              <a:lnSpc>
+                <a:spcPct val="114000"/>
+              </a:lnSpc>
+            </a:pPr>
+            <a:r>
+              <a:rPr sz="1000" b="0">
+                <a:solidFill>
+                  <a:srgbClr val="8A97B5"/>
+                </a:solidFill>
+              </a:rPr>
+              <a:t>47 / 62</a:t>
+            </a:r>
+          </a:p>
+        </p:txBody>
+      </p:sp>
+      <p:sp>
+        <p:nvSpPr>
+          <p:cNvPr id="11" name="TextBox 10"/>
+          <p:cNvSpPr txBox="1"/>
+          <p:nvPr/>
+        </p:nvSpPr>
+        <p:spPr>
+          <a:xfrm>
+            <a:off x="475488" y="1517904"/>
+            <a:ext cx="11237976" cy="237744"/>
+          </a:xfrm>
+          <a:prstGeom prst="rect">
+            <a:avLst/>
+          </a:prstGeom>
+          <a:noFill/>
+        </p:spPr>
+        <p:txBody>
+          <a:bodyPr wrap="square" anchor="t" lIns="0" rIns="0" tIns="0" bIns="0">
+            <a:spAutoFit/>
+          </a:bodyPr>
+          <a:lstStyle/>
+          <a:p>
+            <a:pPr algn="l">
+              <a:lnSpc>
+                <a:spcPct val="114000"/>
+              </a:lnSpc>
+            </a:pPr>
+            <a:r>
+              <a:rPr sz="1000" b="0">
+                <a:solidFill>
+                  <a:srgbClr val="5C6E6A"/>
+                </a:solidFill>
+              </a:rPr>
+              <a:t>上：p41_collector_hub 分层达标逐字输出（见上一页）｜下：pytest 全量实跑（退出码 0，全绿）</a:t>
+            </a:r>
+          </a:p>
+        </p:txBody>
+      </p:sp>
+      <p:pic>
+        <p:nvPicPr>
+          <p:cNvPr id="12" name="Picture 11" descr="p41_collector_hub_classroom.png"/>
+          <p:cNvPicPr>
+            <a:picLocks noChangeAspect="1"/>
+          </p:cNvPicPr>
+          <p:nvPr/>
+        </p:nvPicPr>
+        <p:blipFill>
+          <a:blip r:embed="rId2"/>
+          <a:stretch>
+            <a:fillRect/>
+          </a:stretch>
+        </p:blipFill>
+        <p:spPr>
+          <a:xfrm>
+            <a:off x="1096272" y="1792224"/>
+            <a:ext cx="9996406" cy="2169220"/>
+          </a:xfrm>
+          <a:prstGeom prst="rect">
+            <a:avLst/>
+          </a:prstGeom>
+        </p:spPr>
+      </p:pic>
+      <p:sp>
+        <p:nvSpPr>
+          <p:cNvPr id="13" name="TextBox 12"/>
+          <p:cNvSpPr txBox="1"/>
+          <p:nvPr/>
+        </p:nvSpPr>
+        <p:spPr>
+          <a:xfrm>
+            <a:off x="475488" y="3998020"/>
+            <a:ext cx="11237976" cy="256032"/>
+          </a:xfrm>
+          <a:prstGeom prst="rect">
+            <a:avLst/>
+          </a:prstGeom>
+          <a:noFill/>
+        </p:spPr>
+        <p:txBody>
+          <a:bodyPr wrap="square" anchor="t" lIns="0" rIns="0" tIns="0" bIns="0">
+            <a:spAutoFit/>
+          </a:bodyPr>
+          <a:lstStyle/>
+          <a:p>
+            <a:pPr algn="l">
+              <a:lnSpc>
+                <a:spcPct val="114000"/>
+              </a:lnSpc>
+            </a:pPr>
+            <a:r>
+              <a:rPr sz="850" b="0">
+                <a:solidFill>
+                  <a:srgbClr val="5C6E6A"/>
+                </a:solidFill>
+              </a:rPr>
+              <a:t>▲ 分层达标（第 44 行起）：四档逐字原文，未改写</a:t>
+            </a:r>
+          </a:p>
+        </p:txBody>
+      </p:sp>
+      <p:pic>
+        <p:nvPicPr>
+          <p:cNvPr id="14" name="Picture 13" descr="p41_collector_hub_pytest.png"/>
+          <p:cNvPicPr>
+            <a:picLocks noChangeAspect="1"/>
+          </p:cNvPicPr>
+          <p:nvPr/>
+        </p:nvPicPr>
+        <p:blipFill>
+          <a:blip r:embed="rId3"/>
+          <a:stretch>
+            <a:fillRect/>
+          </a:stretch>
+        </p:blipFill>
+        <p:spPr>
+          <a:xfrm>
+            <a:off x="1096272" y="4272340"/>
+            <a:ext cx="9996406" cy="1369508"/>
+          </a:xfrm>
+          <a:prstGeom prst="rect">
+            <a:avLst/>
+          </a:prstGeom>
+        </p:spPr>
+      </p:pic>
+      <p:sp>
+        <p:nvSpPr>
+          <p:cNvPr id="15" name="TextBox 14"/>
+          <p:cNvSpPr txBox="1"/>
+          <p:nvPr/>
+        </p:nvSpPr>
+        <p:spPr>
+          <a:xfrm>
+            <a:off x="475488" y="5678424"/>
+            <a:ext cx="11237976" cy="256032"/>
+          </a:xfrm>
+          <a:prstGeom prst="rect">
+            <a:avLst/>
+          </a:prstGeom>
+          <a:noFill/>
+        </p:spPr>
+        <p:txBody>
+          <a:bodyPr wrap="square" anchor="t" lIns="0" rIns="0" tIns="0" bIns="0">
+            <a:spAutoFit/>
+          </a:bodyPr>
+          <a:lstStyle/>
+          <a:p>
+            <a:pPr algn="l">
+              <a:lnSpc>
+                <a:spcPct val="114000"/>
+              </a:lnSpc>
+            </a:pPr>
+            <a:r>
+              <a:rPr sz="850" b="0">
+                <a:solidFill>
+                  <a:srgbClr val="5C6E6A"/>
+                </a:solidFill>
+              </a:rPr>
+              <a:t>▲ pytest：47 passed in 0.28s（本机实跑，非示例）</a:t>
+            </a:r>
           </a:p>
         </p:txBody>
       </p:sp>
@@ -60661,7 +63678,7 @@
                 </a:solidFill>
                 <a:latin typeface="微软雅黑" panose="020B0502040204020203" charset="-122"/>
               </a:rPr>
-              <a:t>7 / 59</a:t>
+              <a:t>7 / 62</a:t>
             </a:r>
             <a:endParaRPr sz="1000" b="0">
               <a:solidFill>
@@ -62395,7 +65412,7 @@
                 </a:solidFill>
                 <a:latin typeface="微软雅黑" panose="020B0502040204020203" charset="-122"/>
               </a:rPr>
-              <a:t>8 / 59</a:t>
+              <a:t>8 / 62</a:t>
             </a:r>
             <a:endParaRPr sz="1000" b="0">
               <a:solidFill>
@@ -63316,7 +66333,7 @@
                 </a:solidFill>
                 <a:latin typeface="微软雅黑" panose="020B0502040204020203" charset="-122"/>
               </a:rPr>
-              <a:t>9 / 59</a:t>
+              <a:t>9 / 62</a:t>
             </a:r>
             <a:endParaRPr sz="1000" b="0">
               <a:solidFill>
